--- a/pitch/ai-marketing-2026.pptx
+++ b/pitch/ai-marketing-2026.pptx
@@ -3222,7 +3222,7 @@
                 </a:solidFill>
                 <a:latin typeface="Inter"/>
               </a:rPr>
-              <a:t>2026 ENTERPRISE BRIEF  ·  v4.0</a:t>
+              <a:t>2026 ENTERPRISE BRIEF  ·  v5.0</a:t>
             </a:r>
           </a:p>
         </p:txBody>
@@ -3783,7 +3783,7 @@
         <p:spPr>
           <a:xfrm>
             <a:off x="914400" y="292608"/>
-            <a:ext cx="3657600" cy="274320"/>
+            <a:ext cx="5486400" cy="274320"/>
           </a:xfrm>
           <a:prstGeom prst="rect">
             <a:avLst/>
@@ -5538,8 +5538,47 @@
         </p:nvSpPr>
         <p:spPr>
           <a:xfrm>
-            <a:off x="11338560" y="6446520"/>
-            <a:ext cx="731520" cy="274320"/>
+            <a:off x="548640" y="6446520"/>
+            <a:ext cx="7315200" cy="274320"/>
+          </a:xfrm>
+          <a:prstGeom prst="rect">
+            <a:avLst/>
+          </a:prstGeom>
+          <a:noFill/>
+        </p:spPr>
+        <p:txBody>
+          <a:bodyPr wrap="square" lIns="0" rIns="0" tIns="0" bIns="0" anchor="t">
+            <a:spAutoFit/>
+          </a:bodyPr>
+          <a:lstStyle/>
+          <a:p>
+            <a:pPr algn="l">
+              <a:lnSpc>
+                <a:spcPct val="120000"/>
+              </a:lnSpc>
+            </a:pPr>
+            <a:r>
+              <a:rPr sz="800" b="0">
+                <a:solidFill>
+                  <a:srgbClr val="6E685C"/>
+                </a:solidFill>
+                <a:latin typeface="Inter"/>
+              </a:rPr>
+              <a:t>DATA  →  EXEC  →  ATTRIB  ·  无界智源全栈闭环</a:t>
+            </a:r>
+          </a:p>
+        </p:txBody>
+      </p:sp>
+      <p:sp>
+        <p:nvSpPr>
+          <p:cNvPr id="44" name="TextBox 43"/>
+          <p:cNvSpPr txBox="1"/>
+          <p:nvPr/>
+        </p:nvSpPr>
+        <p:spPr>
+          <a:xfrm>
+            <a:off x="10607040" y="6446520"/>
+            <a:ext cx="1463040" cy="274320"/>
           </a:xfrm>
           <a:prstGeom prst="rect">
             <a:avLst/>
@@ -5639,7 +5678,7 @@
         <p:spPr>
           <a:xfrm>
             <a:off x="914400" y="292608"/>
-            <a:ext cx="3657600" cy="274320"/>
+            <a:ext cx="5486400" cy="274320"/>
           </a:xfrm>
           <a:prstGeom prst="rect">
             <a:avLst/>
@@ -7959,7 +7998,7 @@
                 <a:latin typeface="Microsoft YaHei"/>
               </a:rPr>
               <a:t>无中文排版
-流量降 38%
+流量持续下滑
 无 API 商用通道</a:t>
             </a:r>
           </a:p>
@@ -9013,8 +9052,47 @@
         </p:nvSpPr>
         <p:spPr>
           <a:xfrm>
-            <a:off x="11338560" y="6446520"/>
-            <a:ext cx="731520" cy="274320"/>
+            <a:off x="548640" y="6446520"/>
+            <a:ext cx="7315200" cy="274320"/>
+          </a:xfrm>
+          <a:prstGeom prst="rect">
+            <a:avLst/>
+          </a:prstGeom>
+          <a:noFill/>
+        </p:spPr>
+        <p:txBody>
+          <a:bodyPr wrap="square" lIns="0" rIns="0" tIns="0" bIns="0" anchor="t">
+            <a:spAutoFit/>
+          </a:bodyPr>
+          <a:lstStyle/>
+          <a:p>
+            <a:pPr algn="l">
+              <a:lnSpc>
+                <a:spcPct val="120000"/>
+              </a:lnSpc>
+            </a:pPr>
+            <a:r>
+              <a:rPr sz="800" b="0">
+                <a:solidFill>
+                  <a:srgbClr val="6E685C"/>
+                </a:solidFill>
+                <a:latin typeface="Inter"/>
+              </a:rPr>
+              <a:t>DATA  →  EXEC  →  ATTRIB  ·  无界智源全栈闭环</a:t>
+            </a:r>
+          </a:p>
+        </p:txBody>
+      </p:sp>
+      <p:sp>
+        <p:nvSpPr>
+          <p:cNvPr id="82" name="TextBox 81"/>
+          <p:cNvSpPr txBox="1"/>
+          <p:nvPr/>
+        </p:nvSpPr>
+        <p:spPr>
+          <a:xfrm>
+            <a:off x="10607040" y="6446520"/>
+            <a:ext cx="1463040" cy="274320"/>
           </a:xfrm>
           <a:prstGeom prst="rect">
             <a:avLst/>
@@ -9114,7 +9192,7 @@
         <p:spPr>
           <a:xfrm>
             <a:off x="914400" y="292608"/>
-            <a:ext cx="3657600" cy="274320"/>
+            <a:ext cx="5486400" cy="274320"/>
           </a:xfrm>
           <a:prstGeom prst="rect">
             <a:avLst/>
@@ -10601,8 +10679,47 @@
         </p:nvSpPr>
         <p:spPr>
           <a:xfrm>
-            <a:off x="11338560" y="6446520"/>
-            <a:ext cx="731520" cy="274320"/>
+            <a:off x="548640" y="6446520"/>
+            <a:ext cx="7315200" cy="274320"/>
+          </a:xfrm>
+          <a:prstGeom prst="rect">
+            <a:avLst/>
+          </a:prstGeom>
+          <a:noFill/>
+        </p:spPr>
+        <p:txBody>
+          <a:bodyPr wrap="square" lIns="0" rIns="0" tIns="0" bIns="0" anchor="t">
+            <a:spAutoFit/>
+          </a:bodyPr>
+          <a:lstStyle/>
+          <a:p>
+            <a:pPr algn="l">
+              <a:lnSpc>
+                <a:spcPct val="120000"/>
+              </a:lnSpc>
+            </a:pPr>
+            <a:r>
+              <a:rPr sz="800" b="0">
+                <a:solidFill>
+                  <a:srgbClr val="6E685C"/>
+                </a:solidFill>
+                <a:latin typeface="Inter"/>
+              </a:rPr>
+              <a:t>DATA  →  EXEC  →  ATTRIB  ·  无界智源全栈闭环</a:t>
+            </a:r>
+          </a:p>
+        </p:txBody>
+      </p:sp>
+      <p:sp>
+        <p:nvSpPr>
+          <p:cNvPr id="41" name="TextBox 40"/>
+          <p:cNvSpPr txBox="1"/>
+          <p:nvPr/>
+        </p:nvSpPr>
+        <p:spPr>
+          <a:xfrm>
+            <a:off x="10607040" y="6446520"/>
+            <a:ext cx="1463040" cy="274320"/>
           </a:xfrm>
           <a:prstGeom prst="rect">
             <a:avLst/>
@@ -10702,7 +10819,7 @@
         <p:spPr>
           <a:xfrm>
             <a:off x="914400" y="292608"/>
-            <a:ext cx="3657600" cy="274320"/>
+            <a:ext cx="5486400" cy="274320"/>
           </a:xfrm>
           <a:prstGeom prst="rect">
             <a:avLst/>
@@ -12469,8 +12586,47 @@
         </p:nvSpPr>
         <p:spPr>
           <a:xfrm>
-            <a:off x="11338560" y="6446520"/>
-            <a:ext cx="731520" cy="274320"/>
+            <a:off x="548640" y="6446520"/>
+            <a:ext cx="7315200" cy="274320"/>
+          </a:xfrm>
+          <a:prstGeom prst="rect">
+            <a:avLst/>
+          </a:prstGeom>
+          <a:noFill/>
+        </p:spPr>
+        <p:txBody>
+          <a:bodyPr wrap="square" lIns="0" rIns="0" tIns="0" bIns="0" anchor="t">
+            <a:spAutoFit/>
+          </a:bodyPr>
+          <a:lstStyle/>
+          <a:p>
+            <a:pPr algn="l">
+              <a:lnSpc>
+                <a:spcPct val="120000"/>
+              </a:lnSpc>
+            </a:pPr>
+            <a:r>
+              <a:rPr sz="800" b="0">
+                <a:solidFill>
+                  <a:srgbClr val="6E685C"/>
+                </a:solidFill>
+                <a:latin typeface="Inter"/>
+              </a:rPr>
+              <a:t>DATA  →  EXEC  →  ATTRIB  ·  无界智源全栈闭环</a:t>
+            </a:r>
+          </a:p>
+        </p:txBody>
+      </p:sp>
+      <p:sp>
+        <p:nvSpPr>
+          <p:cNvPr id="46" name="TextBox 45"/>
+          <p:cNvSpPr txBox="1"/>
+          <p:nvPr/>
+        </p:nvSpPr>
+        <p:spPr>
+          <a:xfrm>
+            <a:off x="10607040" y="6446520"/>
+            <a:ext cx="1463040" cy="274320"/>
           </a:xfrm>
           <a:prstGeom prst="rect">
             <a:avLst/>
@@ -12570,7 +12726,7 @@
         <p:spPr>
           <a:xfrm>
             <a:off x="914400" y="292608"/>
-            <a:ext cx="3657600" cy="274320"/>
+            <a:ext cx="5486400" cy="274320"/>
           </a:xfrm>
           <a:prstGeom prst="rect">
             <a:avLst/>
@@ -14139,8 +14295,47 @@
         </p:nvSpPr>
         <p:spPr>
           <a:xfrm>
-            <a:off x="11338560" y="6446520"/>
-            <a:ext cx="731520" cy="274320"/>
+            <a:off x="548640" y="6446520"/>
+            <a:ext cx="7315200" cy="274320"/>
+          </a:xfrm>
+          <a:prstGeom prst="rect">
+            <a:avLst/>
+          </a:prstGeom>
+          <a:noFill/>
+        </p:spPr>
+        <p:txBody>
+          <a:bodyPr wrap="square" lIns="0" rIns="0" tIns="0" bIns="0" anchor="t">
+            <a:spAutoFit/>
+          </a:bodyPr>
+          <a:lstStyle/>
+          <a:p>
+            <a:pPr algn="l">
+              <a:lnSpc>
+                <a:spcPct val="120000"/>
+              </a:lnSpc>
+            </a:pPr>
+            <a:r>
+              <a:rPr sz="800" b="0">
+                <a:solidFill>
+                  <a:srgbClr val="6E685C"/>
+                </a:solidFill>
+                <a:latin typeface="Inter"/>
+              </a:rPr>
+              <a:t>DATA  →  EXEC  →  ATTRIB  ·  无界智源全栈闭环</a:t>
+            </a:r>
+          </a:p>
+        </p:txBody>
+      </p:sp>
+      <p:sp>
+        <p:nvSpPr>
+          <p:cNvPr id="42" name="TextBox 41"/>
+          <p:cNvSpPr txBox="1"/>
+          <p:nvPr/>
+        </p:nvSpPr>
+        <p:spPr>
+          <a:xfrm>
+            <a:off x="10607040" y="6446520"/>
+            <a:ext cx="1463040" cy="274320"/>
           </a:xfrm>
           <a:prstGeom prst="rect">
             <a:avLst/>
@@ -14240,7 +14435,7 @@
         <p:spPr>
           <a:xfrm>
             <a:off x="914400" y="292608"/>
-            <a:ext cx="3657600" cy="274320"/>
+            <a:ext cx="5486400" cy="274320"/>
           </a:xfrm>
           <a:prstGeom prst="rect">
             <a:avLst/>
@@ -15946,7 +16141,7 @@
                 <a:latin typeface="Microsoft YaHei"/>
               </a:rPr>
               <a:t>AI 外呼
-消金 SaaS 营收 ¥4 亿</a:t>
+消金 SaaS 头部</a:t>
             </a:r>
           </a:p>
         </p:txBody>
@@ -17620,8 +17815,47 @@
         </p:nvSpPr>
         <p:spPr>
           <a:xfrm>
-            <a:off x="11338560" y="6446520"/>
-            <a:ext cx="731520" cy="274320"/>
+            <a:off x="548640" y="6446520"/>
+            <a:ext cx="7315200" cy="274320"/>
+          </a:xfrm>
+          <a:prstGeom prst="rect">
+            <a:avLst/>
+          </a:prstGeom>
+          <a:noFill/>
+        </p:spPr>
+        <p:txBody>
+          <a:bodyPr wrap="square" lIns="0" rIns="0" tIns="0" bIns="0" anchor="t">
+            <a:spAutoFit/>
+          </a:bodyPr>
+          <a:lstStyle/>
+          <a:p>
+            <a:pPr algn="l">
+              <a:lnSpc>
+                <a:spcPct val="120000"/>
+              </a:lnSpc>
+            </a:pPr>
+            <a:r>
+              <a:rPr sz="800" b="0">
+                <a:solidFill>
+                  <a:srgbClr val="6E685C"/>
+                </a:solidFill>
+                <a:latin typeface="Inter"/>
+              </a:rPr>
+              <a:t>DATA  →  EXEC  →  ATTRIB  ·  无界智源全栈闭环</a:t>
+            </a:r>
+          </a:p>
+        </p:txBody>
+      </p:sp>
+      <p:sp>
+        <p:nvSpPr>
+          <p:cNvPr id="82" name="TextBox 81"/>
+          <p:cNvSpPr txBox="1"/>
+          <p:nvPr/>
+        </p:nvSpPr>
+        <p:spPr>
+          <a:xfrm>
+            <a:off x="10607040" y="6446520"/>
+            <a:ext cx="1463040" cy="274320"/>
           </a:xfrm>
           <a:prstGeom prst="rect">
             <a:avLst/>
@@ -17721,7 +17955,7 @@
         <p:spPr>
           <a:xfrm>
             <a:off x="914400" y="292608"/>
-            <a:ext cx="3657600" cy="274320"/>
+            <a:ext cx="5486400" cy="274320"/>
           </a:xfrm>
           <a:prstGeom prst="rect">
             <a:avLst/>
@@ -19547,8 +19781,47 @@
         </p:nvSpPr>
         <p:spPr>
           <a:xfrm>
-            <a:off x="11338560" y="6446520"/>
-            <a:ext cx="731520" cy="274320"/>
+            <a:off x="548640" y="6446520"/>
+            <a:ext cx="7315200" cy="274320"/>
+          </a:xfrm>
+          <a:prstGeom prst="rect">
+            <a:avLst/>
+          </a:prstGeom>
+          <a:noFill/>
+        </p:spPr>
+        <p:txBody>
+          <a:bodyPr wrap="square" lIns="0" rIns="0" tIns="0" bIns="0" anchor="t">
+            <a:spAutoFit/>
+          </a:bodyPr>
+          <a:lstStyle/>
+          <a:p>
+            <a:pPr algn="l">
+              <a:lnSpc>
+                <a:spcPct val="120000"/>
+              </a:lnSpc>
+            </a:pPr>
+            <a:r>
+              <a:rPr sz="800" b="0">
+                <a:solidFill>
+                  <a:srgbClr val="6E685C"/>
+                </a:solidFill>
+                <a:latin typeface="Inter"/>
+              </a:rPr>
+              <a:t>DATA  →  EXEC  →  ATTRIB  ·  无界智源全栈闭环</a:t>
+            </a:r>
+          </a:p>
+        </p:txBody>
+      </p:sp>
+      <p:sp>
+        <p:nvSpPr>
+          <p:cNvPr id="47" name="TextBox 46"/>
+          <p:cNvSpPr txBox="1"/>
+          <p:nvPr/>
+        </p:nvSpPr>
+        <p:spPr>
+          <a:xfrm>
+            <a:off x="10607040" y="6446520"/>
+            <a:ext cx="1463040" cy="274320"/>
           </a:xfrm>
           <a:prstGeom prst="rect">
             <a:avLst/>
@@ -19648,7 +19921,7 @@
         <p:spPr>
           <a:xfrm>
             <a:off x="914400" y="292608"/>
-            <a:ext cx="3657600" cy="274320"/>
+            <a:ext cx="5486400" cy="274320"/>
           </a:xfrm>
           <a:prstGeom prst="rect">
             <a:avLst/>
@@ -21368,8 +21641,47 @@
         </p:nvSpPr>
         <p:spPr>
           <a:xfrm>
-            <a:off x="11338560" y="6446520"/>
-            <a:ext cx="731520" cy="274320"/>
+            <a:off x="548640" y="6446520"/>
+            <a:ext cx="7315200" cy="274320"/>
+          </a:xfrm>
+          <a:prstGeom prst="rect">
+            <a:avLst/>
+          </a:prstGeom>
+          <a:noFill/>
+        </p:spPr>
+        <p:txBody>
+          <a:bodyPr wrap="square" lIns="0" rIns="0" tIns="0" bIns="0" anchor="t">
+            <a:spAutoFit/>
+          </a:bodyPr>
+          <a:lstStyle/>
+          <a:p>
+            <a:pPr algn="l">
+              <a:lnSpc>
+                <a:spcPct val="120000"/>
+              </a:lnSpc>
+            </a:pPr>
+            <a:r>
+              <a:rPr sz="800" b="0">
+                <a:solidFill>
+                  <a:srgbClr val="6E685C"/>
+                </a:solidFill>
+                <a:latin typeface="Inter"/>
+              </a:rPr>
+              <a:t>DATA  →  EXEC  →  ATTRIB  ·  无界智源全栈闭环</a:t>
+            </a:r>
+          </a:p>
+        </p:txBody>
+      </p:sp>
+      <p:sp>
+        <p:nvSpPr>
+          <p:cNvPr id="46" name="TextBox 45"/>
+          <p:cNvSpPr txBox="1"/>
+          <p:nvPr/>
+        </p:nvSpPr>
+        <p:spPr>
+          <a:xfrm>
+            <a:off x="10607040" y="6446520"/>
+            <a:ext cx="1463040" cy="274320"/>
           </a:xfrm>
           <a:prstGeom prst="rect">
             <a:avLst/>
@@ -21469,7 +21781,7 @@
         <p:spPr>
           <a:xfrm>
             <a:off x="914400" y="292608"/>
-            <a:ext cx="3657600" cy="274320"/>
+            <a:ext cx="5486400" cy="274320"/>
           </a:xfrm>
           <a:prstGeom prst="rect">
             <a:avLst/>
@@ -22560,7 +22872,7 @@
                 </a:solidFill>
                 <a:latin typeface="Microsoft YaHei"/>
               </a:rPr>
-              <a:t>带实战案例（13 个项目）
+              <a:t>带多个生产级项目案例
 + MTA+MMM 归因闭环</a:t>
             </a:r>
           </a:p>
@@ -25296,8 +25608,47 @@
         </p:nvSpPr>
         <p:spPr>
           <a:xfrm>
-            <a:off x="11338560" y="6446520"/>
-            <a:ext cx="731520" cy="274320"/>
+            <a:off x="548640" y="6446520"/>
+            <a:ext cx="7315200" cy="274320"/>
+          </a:xfrm>
+          <a:prstGeom prst="rect">
+            <a:avLst/>
+          </a:prstGeom>
+          <a:noFill/>
+        </p:spPr>
+        <p:txBody>
+          <a:bodyPr wrap="square" lIns="0" rIns="0" tIns="0" bIns="0" anchor="t">
+            <a:spAutoFit/>
+          </a:bodyPr>
+          <a:lstStyle/>
+          <a:p>
+            <a:pPr algn="l">
+              <a:lnSpc>
+                <a:spcPct val="120000"/>
+              </a:lnSpc>
+            </a:pPr>
+            <a:r>
+              <a:rPr sz="800" b="0">
+                <a:solidFill>
+                  <a:srgbClr val="6E685C"/>
+                </a:solidFill>
+                <a:latin typeface="Inter"/>
+              </a:rPr>
+              <a:t>DATA  →  EXEC  →  ATTRIB  ·  无界智源全栈闭环</a:t>
+            </a:r>
+          </a:p>
+        </p:txBody>
+      </p:sp>
+      <p:sp>
+        <p:nvSpPr>
+          <p:cNvPr id="92" name="TextBox 91"/>
+          <p:cNvSpPr txBox="1"/>
+          <p:nvPr/>
+        </p:nvSpPr>
+        <p:spPr>
+          <a:xfrm>
+            <a:off x="10607040" y="6446520"/>
+            <a:ext cx="1463040" cy="274320"/>
           </a:xfrm>
           <a:prstGeom prst="rect">
             <a:avLst/>
@@ -25397,7 +25748,7 @@
         <p:spPr>
           <a:xfrm>
             <a:off x="914400" y="292608"/>
-            <a:ext cx="3657600" cy="274320"/>
+            <a:ext cx="5486400" cy="274320"/>
           </a:xfrm>
           <a:prstGeom prst="rect">
             <a:avLst/>
@@ -27062,8 +27413,47 @@
         </p:nvSpPr>
         <p:spPr>
           <a:xfrm>
-            <a:off x="11338560" y="6446520"/>
-            <a:ext cx="731520" cy="274320"/>
+            <a:off x="548640" y="6446520"/>
+            <a:ext cx="7315200" cy="274320"/>
+          </a:xfrm>
+          <a:prstGeom prst="rect">
+            <a:avLst/>
+          </a:prstGeom>
+          <a:noFill/>
+        </p:spPr>
+        <p:txBody>
+          <a:bodyPr wrap="square" lIns="0" rIns="0" tIns="0" bIns="0" anchor="t">
+            <a:spAutoFit/>
+          </a:bodyPr>
+          <a:lstStyle/>
+          <a:p>
+            <a:pPr algn="l">
+              <a:lnSpc>
+                <a:spcPct val="120000"/>
+              </a:lnSpc>
+            </a:pPr>
+            <a:r>
+              <a:rPr sz="800" b="0">
+                <a:solidFill>
+                  <a:srgbClr val="6E685C"/>
+                </a:solidFill>
+                <a:latin typeface="Inter"/>
+              </a:rPr>
+              <a:t>DATA  →  EXEC  →  ATTRIB  ·  无界智源全栈闭环</a:t>
+            </a:r>
+          </a:p>
+        </p:txBody>
+      </p:sp>
+      <p:sp>
+        <p:nvSpPr>
+          <p:cNvPr id="42" name="TextBox 41"/>
+          <p:cNvSpPr txBox="1"/>
+          <p:nvPr/>
+        </p:nvSpPr>
+        <p:spPr>
+          <a:xfrm>
+            <a:off x="10607040" y="6446520"/>
+            <a:ext cx="1463040" cy="274320"/>
           </a:xfrm>
           <a:prstGeom prst="rect">
             <a:avLst/>
@@ -27163,7 +27553,7 @@
         <p:spPr>
           <a:xfrm>
             <a:off x="914400" y="292608"/>
-            <a:ext cx="3657600" cy="274320"/>
+            <a:ext cx="5486400" cy="274320"/>
           </a:xfrm>
           <a:prstGeom prst="rect">
             <a:avLst/>
@@ -28708,8 +29098,47 @@
         </p:nvSpPr>
         <p:spPr>
           <a:xfrm>
-            <a:off x="11338560" y="6446520"/>
-            <a:ext cx="731520" cy="274320"/>
+            <a:off x="548640" y="6446520"/>
+            <a:ext cx="7315200" cy="274320"/>
+          </a:xfrm>
+          <a:prstGeom prst="rect">
+            <a:avLst/>
+          </a:prstGeom>
+          <a:noFill/>
+        </p:spPr>
+        <p:txBody>
+          <a:bodyPr wrap="square" lIns="0" rIns="0" tIns="0" bIns="0" anchor="t">
+            <a:spAutoFit/>
+          </a:bodyPr>
+          <a:lstStyle/>
+          <a:p>
+            <a:pPr algn="l">
+              <a:lnSpc>
+                <a:spcPct val="120000"/>
+              </a:lnSpc>
+            </a:pPr>
+            <a:r>
+              <a:rPr sz="800" b="0">
+                <a:solidFill>
+                  <a:srgbClr val="6E685C"/>
+                </a:solidFill>
+                <a:latin typeface="Inter"/>
+              </a:rPr>
+              <a:t>DATA  →  EXEC  →  ATTRIB  ·  无界智源全栈闭环</a:t>
+            </a:r>
+          </a:p>
+        </p:txBody>
+      </p:sp>
+      <p:sp>
+        <p:nvSpPr>
+          <p:cNvPr id="42" name="TextBox 41"/>
+          <p:cNvSpPr txBox="1"/>
+          <p:nvPr/>
+        </p:nvSpPr>
+        <p:spPr>
+          <a:xfrm>
+            <a:off x="10607040" y="6446520"/>
+            <a:ext cx="1463040" cy="274320"/>
           </a:xfrm>
           <a:prstGeom prst="rect">
             <a:avLst/>
@@ -28809,7 +29238,7 @@
         <p:spPr>
           <a:xfrm>
             <a:off x="914400" y="292608"/>
-            <a:ext cx="3657600" cy="274320"/>
+            <a:ext cx="5486400" cy="274320"/>
           </a:xfrm>
           <a:prstGeom prst="rect">
             <a:avLst/>
@@ -30766,8 +31195,47 @@
         </p:nvSpPr>
         <p:spPr>
           <a:xfrm>
-            <a:off x="11338560" y="6446520"/>
-            <a:ext cx="731520" cy="274320"/>
+            <a:off x="548640" y="6446520"/>
+            <a:ext cx="7315200" cy="274320"/>
+          </a:xfrm>
+          <a:prstGeom prst="rect">
+            <a:avLst/>
+          </a:prstGeom>
+          <a:noFill/>
+        </p:spPr>
+        <p:txBody>
+          <a:bodyPr wrap="square" lIns="0" rIns="0" tIns="0" bIns="0" anchor="t">
+            <a:spAutoFit/>
+          </a:bodyPr>
+          <a:lstStyle/>
+          <a:p>
+            <a:pPr algn="l">
+              <a:lnSpc>
+                <a:spcPct val="120000"/>
+              </a:lnSpc>
+            </a:pPr>
+            <a:r>
+              <a:rPr sz="800" b="0">
+                <a:solidFill>
+                  <a:srgbClr val="6E685C"/>
+                </a:solidFill>
+                <a:latin typeface="Inter"/>
+              </a:rPr>
+              <a:t>DATA  →  EXEC  →  ATTRIB  ·  无界智源全栈闭环</a:t>
+            </a:r>
+          </a:p>
+        </p:txBody>
+      </p:sp>
+      <p:sp>
+        <p:nvSpPr>
+          <p:cNvPr id="52" name="TextBox 51"/>
+          <p:cNvSpPr txBox="1"/>
+          <p:nvPr/>
+        </p:nvSpPr>
+        <p:spPr>
+          <a:xfrm>
+            <a:off x="10607040" y="6446520"/>
+            <a:ext cx="1463040" cy="274320"/>
           </a:xfrm>
           <a:prstGeom prst="rect">
             <a:avLst/>
@@ -30867,7 +31335,7 @@
         <p:spPr>
           <a:xfrm>
             <a:off x="914400" y="292608"/>
-            <a:ext cx="3657600" cy="274320"/>
+            <a:ext cx="5486400" cy="274320"/>
           </a:xfrm>
           <a:prstGeom prst="rect">
             <a:avLst/>
@@ -31289,7 +31757,7 @@
                 </a:solidFill>
                 <a:latin typeface="Microsoft YaHei"/>
               </a:rPr>
-              <a:t>· 硅基智能（S级 ¥3980/形象/年）</a:t>
+              <a:t>· 硅基智能（S 级 ¥3980/形象/年）</a:t>
             </a:r>
           </a:p>
           <a:p>
@@ -31543,7 +32011,7 @@
                 </a:solidFill>
                 <a:latin typeface="Microsoft YaHei"/>
               </a:rPr>
-              <a:t>· 百应科技（消金 SaaS 营收 ¥4 亿）</a:t>
+              <a:t>· 百应科技（消金 SaaS 头部）</a:t>
             </a:r>
           </a:p>
           <a:p>
@@ -32739,7 +33207,7 @@
                 </a:solidFill>
                 <a:latin typeface="Microsoft YaHei"/>
               </a:rPr>
-              <a:t>素材市场 ¥120 亿  ·  二创 +87.2%</a:t>
+              <a:t>素材市场 ¥120 亿  ·  二创增长显著</a:t>
             </a:r>
           </a:p>
         </p:txBody>
@@ -33228,7 +33696,7 @@
                 </a:solidFill>
                 <a:latin typeface="Microsoft YaHei"/>
               </a:rPr>
-              <a:t>→ 8 个赛道都有头部玩家，但都『垂直深耕』『单点工具』。没有一家能提供『9 大能力 + 数据底座 + 归因闭环』的端到端方案。这就是我们的差异化空间。</a:t>
+              <a:t>→ 8 个赛道都有头部玩家，但都『垂直深耕』『单点工具』。没有一家能提供『9 大能力 + 数据底座 + 归因闭环』的端到端方案。</a:t>
             </a:r>
           </a:p>
         </p:txBody>
@@ -33241,8 +33709,47 @@
         </p:nvSpPr>
         <p:spPr>
           <a:xfrm>
-            <a:off x="11338560" y="6446520"/>
-            <a:ext cx="731520" cy="274320"/>
+            <a:off x="548640" y="6446520"/>
+            <a:ext cx="7315200" cy="274320"/>
+          </a:xfrm>
+          <a:prstGeom prst="rect">
+            <a:avLst/>
+          </a:prstGeom>
+          <a:noFill/>
+        </p:spPr>
+        <p:txBody>
+          <a:bodyPr wrap="square" lIns="0" rIns="0" tIns="0" bIns="0" anchor="t">
+            <a:spAutoFit/>
+          </a:bodyPr>
+          <a:lstStyle/>
+          <a:p>
+            <a:pPr algn="l">
+              <a:lnSpc>
+                <a:spcPct val="120000"/>
+              </a:lnSpc>
+            </a:pPr>
+            <a:r>
+              <a:rPr sz="800" b="0">
+                <a:solidFill>
+                  <a:srgbClr val="6E685C"/>
+                </a:solidFill>
+                <a:latin typeface="Inter"/>
+              </a:rPr>
+              <a:t>DATA  →  EXEC  →  ATTRIB  ·  无界智源全栈闭环</a:t>
+            </a:r>
+          </a:p>
+        </p:txBody>
+      </p:sp>
+      <p:sp>
+        <p:nvSpPr>
+          <p:cNvPr id="53" name="TextBox 52"/>
+          <p:cNvSpPr txBox="1"/>
+          <p:nvPr/>
+        </p:nvSpPr>
+        <p:spPr>
+          <a:xfrm>
+            <a:off x="10607040" y="6446520"/>
+            <a:ext cx="1463040" cy="274320"/>
           </a:xfrm>
           <a:prstGeom prst="rect">
             <a:avLst/>
@@ -33342,7 +33849,7 @@
         <p:spPr>
           <a:xfrm>
             <a:off x="914400" y="292608"/>
-            <a:ext cx="3657600" cy="274320"/>
+            <a:ext cx="5486400" cy="274320"/>
           </a:xfrm>
           <a:prstGeom prst="rect">
             <a:avLst/>
@@ -36111,8 +36618,47 @@
         </p:nvSpPr>
         <p:spPr>
           <a:xfrm>
-            <a:off x="11338560" y="6446520"/>
-            <a:ext cx="731520" cy="274320"/>
+            <a:off x="548640" y="6446520"/>
+            <a:ext cx="7315200" cy="274320"/>
+          </a:xfrm>
+          <a:prstGeom prst="rect">
+            <a:avLst/>
+          </a:prstGeom>
+          <a:noFill/>
+        </p:spPr>
+        <p:txBody>
+          <a:bodyPr wrap="square" lIns="0" rIns="0" tIns="0" bIns="0" anchor="t">
+            <a:spAutoFit/>
+          </a:bodyPr>
+          <a:lstStyle/>
+          <a:p>
+            <a:pPr algn="l">
+              <a:lnSpc>
+                <a:spcPct val="120000"/>
+              </a:lnSpc>
+            </a:pPr>
+            <a:r>
+              <a:rPr sz="800" b="0">
+                <a:solidFill>
+                  <a:srgbClr val="6E685C"/>
+                </a:solidFill>
+                <a:latin typeface="Inter"/>
+              </a:rPr>
+              <a:t>DATA  →  EXEC  →  ATTRIB  ·  无界智源全栈闭环</a:t>
+            </a:r>
+          </a:p>
+        </p:txBody>
+      </p:sp>
+      <p:sp>
+        <p:nvSpPr>
+          <p:cNvPr id="69" name="TextBox 68"/>
+          <p:cNvSpPr txBox="1"/>
+          <p:nvPr/>
+        </p:nvSpPr>
+        <p:spPr>
+          <a:xfrm>
+            <a:off x="10607040" y="6446520"/>
+            <a:ext cx="1463040" cy="274320"/>
           </a:xfrm>
           <a:prstGeom prst="rect">
             <a:avLst/>
@@ -36212,7 +36758,7 @@
         <p:spPr>
           <a:xfrm>
             <a:off x="914400" y="292608"/>
-            <a:ext cx="3657600" cy="274320"/>
+            <a:ext cx="5486400" cy="274320"/>
           </a:xfrm>
           <a:prstGeom prst="rect">
             <a:avLst/>
@@ -38707,7 +39253,7 @@
                 </a:solidFill>
                 <a:latin typeface="Microsoft YaHei"/>
               </a:rPr>
-              <a:t>→ 9 大能力不是 9 个工具，而是 1 套数据底座 + 9 个执行臂。底座打通，臂才能协同。</a:t>
+              <a:t>→ 9 大能力 = 1 套数据底座（CDP+OneID）+ 9 个执行臂 + 1 套归因闭环。底座打通，臂才能协同。</a:t>
             </a:r>
           </a:p>
         </p:txBody>
@@ -38720,8 +39266,47 @@
         </p:nvSpPr>
         <p:spPr>
           <a:xfrm>
-            <a:off x="11338560" y="6446520"/>
-            <a:ext cx="731520" cy="274320"/>
+            <a:off x="548640" y="6446520"/>
+            <a:ext cx="7315200" cy="274320"/>
+          </a:xfrm>
+          <a:prstGeom prst="rect">
+            <a:avLst/>
+          </a:prstGeom>
+          <a:noFill/>
+        </p:spPr>
+        <p:txBody>
+          <a:bodyPr wrap="square" lIns="0" rIns="0" tIns="0" bIns="0" anchor="t">
+            <a:spAutoFit/>
+          </a:bodyPr>
+          <a:lstStyle/>
+          <a:p>
+            <a:pPr algn="l">
+              <a:lnSpc>
+                <a:spcPct val="120000"/>
+              </a:lnSpc>
+            </a:pPr>
+            <a:r>
+              <a:rPr sz="800" b="0">
+                <a:solidFill>
+                  <a:srgbClr val="6E685C"/>
+                </a:solidFill>
+                <a:latin typeface="Inter"/>
+              </a:rPr>
+              <a:t>DATA  →  EXEC  →  ATTRIB  ·  无界智源全栈闭环</a:t>
+            </a:r>
+          </a:p>
+        </p:txBody>
+      </p:sp>
+      <p:sp>
+        <p:nvSpPr>
+          <p:cNvPr id="66" name="TextBox 65"/>
+          <p:cNvSpPr txBox="1"/>
+          <p:nvPr/>
+        </p:nvSpPr>
+        <p:spPr>
+          <a:xfrm>
+            <a:off x="10607040" y="6446520"/>
+            <a:ext cx="1463040" cy="274320"/>
           </a:xfrm>
           <a:prstGeom prst="rect">
             <a:avLst/>
@@ -38821,7 +39406,7 @@
         <p:spPr>
           <a:xfrm>
             <a:off x="914400" y="292608"/>
-            <a:ext cx="3657600" cy="274320"/>
+            <a:ext cx="5486400" cy="274320"/>
           </a:xfrm>
           <a:prstGeom prst="rect">
             <a:avLst/>
@@ -39720,7 +40305,7 @@
                 </a:solidFill>
                 <a:latin typeface="Microsoft YaHei"/>
               </a:rPr>
-              <a:t>▎ 实测结果（赛维时代同款打法）</a:t>
+              <a:t>▎ 实测结果（同类头部跨境卖家打法）</a:t>
             </a:r>
           </a:p>
         </p:txBody>
@@ -40084,8 +40669,47 @@
         </p:nvSpPr>
         <p:spPr>
           <a:xfrm>
-            <a:off x="11338560" y="6446520"/>
-            <a:ext cx="731520" cy="274320"/>
+            <a:off x="548640" y="6446520"/>
+            <a:ext cx="7315200" cy="274320"/>
+          </a:xfrm>
+          <a:prstGeom prst="rect">
+            <a:avLst/>
+          </a:prstGeom>
+          <a:noFill/>
+        </p:spPr>
+        <p:txBody>
+          <a:bodyPr wrap="square" lIns="0" rIns="0" tIns="0" bIns="0" anchor="t">
+            <a:spAutoFit/>
+          </a:bodyPr>
+          <a:lstStyle/>
+          <a:p>
+            <a:pPr algn="l">
+              <a:lnSpc>
+                <a:spcPct val="120000"/>
+              </a:lnSpc>
+            </a:pPr>
+            <a:r>
+              <a:rPr sz="800" b="0">
+                <a:solidFill>
+                  <a:srgbClr val="6E685C"/>
+                </a:solidFill>
+                <a:latin typeface="Inter"/>
+              </a:rPr>
+              <a:t>DATA  →  EXEC  →  ATTRIB  ·  无界智源全栈闭环</a:t>
+            </a:r>
+          </a:p>
+        </p:txBody>
+      </p:sp>
+      <p:sp>
+        <p:nvSpPr>
+          <p:cNvPr id="33" name="TextBox 32"/>
+          <p:cNvSpPr txBox="1"/>
+          <p:nvPr/>
+        </p:nvSpPr>
+        <p:spPr>
+          <a:xfrm>
+            <a:off x="10607040" y="6446520"/>
+            <a:ext cx="1463040" cy="274320"/>
           </a:xfrm>
           <a:prstGeom prst="rect">
             <a:avLst/>
@@ -40185,7 +40809,7 @@
         <p:spPr>
           <a:xfrm>
             <a:off x="914400" y="292608"/>
-            <a:ext cx="3657600" cy="274320"/>
+            <a:ext cx="5486400" cy="274320"/>
           </a:xfrm>
           <a:prstGeom prst="rect">
             <a:avLst/>
@@ -41792,8 +42416,47 @@
         </p:nvSpPr>
         <p:spPr>
           <a:xfrm>
-            <a:off x="11338560" y="6446520"/>
-            <a:ext cx="731520" cy="274320"/>
+            <a:off x="548640" y="6446520"/>
+            <a:ext cx="7315200" cy="274320"/>
+          </a:xfrm>
+          <a:prstGeom prst="rect">
+            <a:avLst/>
+          </a:prstGeom>
+          <a:noFill/>
+        </p:spPr>
+        <p:txBody>
+          <a:bodyPr wrap="square" lIns="0" rIns="0" tIns="0" bIns="0" anchor="t">
+            <a:spAutoFit/>
+          </a:bodyPr>
+          <a:lstStyle/>
+          <a:p>
+            <a:pPr algn="l">
+              <a:lnSpc>
+                <a:spcPct val="120000"/>
+              </a:lnSpc>
+            </a:pPr>
+            <a:r>
+              <a:rPr sz="800" b="0">
+                <a:solidFill>
+                  <a:srgbClr val="6E685C"/>
+                </a:solidFill>
+                <a:latin typeface="Inter"/>
+              </a:rPr>
+              <a:t>DATA  →  EXEC  →  ATTRIB  ·  无界智源全栈闭环</a:t>
+            </a:r>
+          </a:p>
+        </p:txBody>
+      </p:sp>
+      <p:sp>
+        <p:nvSpPr>
+          <p:cNvPr id="43" name="TextBox 42"/>
+          <p:cNvSpPr txBox="1"/>
+          <p:nvPr/>
+        </p:nvSpPr>
+        <p:spPr>
+          <a:xfrm>
+            <a:off x="10607040" y="6446520"/>
+            <a:ext cx="1463040" cy="274320"/>
           </a:xfrm>
           <a:prstGeom prst="rect">
             <a:avLst/>
@@ -41893,7 +42556,7 @@
         <p:spPr>
           <a:xfrm>
             <a:off x="914400" y="292608"/>
-            <a:ext cx="3657600" cy="274320"/>
+            <a:ext cx="5486400" cy="274320"/>
           </a:xfrm>
           <a:prstGeom prst="rect">
             <a:avLst/>
@@ -43552,8 +44215,47 @@
         </p:nvSpPr>
         <p:spPr>
           <a:xfrm>
-            <a:off x="11338560" y="6446520"/>
-            <a:ext cx="731520" cy="274320"/>
+            <a:off x="548640" y="6446520"/>
+            <a:ext cx="7315200" cy="274320"/>
+          </a:xfrm>
+          <a:prstGeom prst="rect">
+            <a:avLst/>
+          </a:prstGeom>
+          <a:noFill/>
+        </p:spPr>
+        <p:txBody>
+          <a:bodyPr wrap="square" lIns="0" rIns="0" tIns="0" bIns="0" anchor="t">
+            <a:spAutoFit/>
+          </a:bodyPr>
+          <a:lstStyle/>
+          <a:p>
+            <a:pPr algn="l">
+              <a:lnSpc>
+                <a:spcPct val="120000"/>
+              </a:lnSpc>
+            </a:pPr>
+            <a:r>
+              <a:rPr sz="800" b="0">
+                <a:solidFill>
+                  <a:srgbClr val="6E685C"/>
+                </a:solidFill>
+                <a:latin typeface="Inter"/>
+              </a:rPr>
+              <a:t>DATA  →  EXEC  →  ATTRIB  ·  无界智源全栈闭环</a:t>
+            </a:r>
+          </a:p>
+        </p:txBody>
+      </p:sp>
+      <p:sp>
+        <p:nvSpPr>
+          <p:cNvPr id="46" name="TextBox 45"/>
+          <p:cNvSpPr txBox="1"/>
+          <p:nvPr/>
+        </p:nvSpPr>
+        <p:spPr>
+          <a:xfrm>
+            <a:off x="10607040" y="6446520"/>
+            <a:ext cx="1463040" cy="274320"/>
           </a:xfrm>
           <a:prstGeom prst="rect">
             <a:avLst/>

--- a/pitch/ai-marketing-2026.pptx
+++ b/pitch/ai-marketing-2026.pptx
@@ -37670,7 +37670,7 @@
                 </a:solidFill>
                 <a:latin typeface="Inter"/>
               </a:rPr>
-              <a:t>可灵 3.0 Pro · Seedance 2.0 极限版</a:t>
+              <a:t>可灵 3.0 Pro · Seedance 2.0</a:t>
             </a:r>
           </a:p>
         </p:txBody>
@@ -42733,7 +42733,7 @@
                 </a:solidFill>
                 <a:latin typeface="Microsoft YaHei"/>
               </a:rPr>
-              <a:t>AI 视频生成  —  可灵 3.0 Pro × Seedance 2.0 极限版</a:t>
+              <a:t>AI 视频生成  —  可灵 3.0 Pro × Seedance 2.0</a:t>
             </a:r>
           </a:p>
         </p:txBody>
@@ -43543,7 +43543,7 @@
                 </a:solidFill>
                 <a:latin typeface="Inter"/>
               </a:rPr>
-              <a:t>Seedance 2.0 极限版</a:t>
+              <a:t>Seedance 2.0</a:t>
             </a:r>
           </a:p>
         </p:txBody>

--- a/pitch/ai-marketing-2026.pptx
+++ b/pitch/ai-marketing-2026.pptx
@@ -5775,7 +5775,7 @@
               </a:lnSpc>
             </a:pPr>
             <a:r>
-              <a:rPr sz="1000" b="1">
+              <a:rPr sz="800" b="1">
                 <a:solidFill>
                   <a:srgbClr val="B8956A"/>
                 </a:solidFill>
@@ -6062,7 +6062,7 @@
               </a:lnSpc>
             </a:pPr>
             <a:r>
-              <a:rPr sz="1050" b="1">
+              <a:rPr sz="800" b="1">
                 <a:solidFill>
                   <a:srgbClr val="F5F1E8"/>
                 </a:solidFill>
@@ -6149,7 +6149,7 @@
               </a:lnSpc>
             </a:pPr>
             <a:r>
-              <a:rPr sz="1050" b="1">
+              <a:rPr sz="800" b="1">
                 <a:solidFill>
                   <a:srgbClr val="F5F1E8"/>
                 </a:solidFill>
@@ -6236,7 +6236,7 @@
               </a:lnSpc>
             </a:pPr>
             <a:r>
-              <a:rPr sz="1050" b="1">
+              <a:rPr sz="800" b="1">
                 <a:solidFill>
                   <a:srgbClr val="F5F1E8"/>
                 </a:solidFill>
@@ -6323,7 +6323,7 @@
               </a:lnSpc>
             </a:pPr>
             <a:r>
-              <a:rPr sz="1050" b="1">
+              <a:rPr sz="800" b="1">
                 <a:solidFill>
                   <a:srgbClr val="D4B896"/>
                 </a:solidFill>
@@ -6410,7 +6410,7 @@
               </a:lnSpc>
             </a:pPr>
             <a:r>
-              <a:rPr sz="900" b="1">
+              <a:rPr sz="800" b="1">
                 <a:solidFill>
                   <a:srgbClr val="B8956A"/>
                 </a:solidFill>
@@ -6493,11 +6493,17 @@
           <a:p>
             <a:pPr algn="l">
               <a:lnSpc>
-                <a:spcPct val="130000"/>
-              </a:lnSpc>
-            </a:pPr>
-            <a:r>
-              <a:rPr sz="900" b="0">
+                <a:spcPct val="100000"/>
+              </a:lnSpc>
+              <a:spcBef>
+                <a:spcPts val="0"/>
+              </a:spcBef>
+              <a:spcAft>
+                <a:spcPts val="0"/>
+              </a:spcAft>
+            </a:pPr>
+            <a:r>
+              <a:rPr sz="800" b="0">
                 <a:solidFill>
                   <a:srgbClr val="F5F1E8"/>
                 </a:solidFill>
@@ -6581,11 +6587,17 @@
           <a:p>
             <a:pPr algn="l">
               <a:lnSpc>
-                <a:spcPct val="130000"/>
-              </a:lnSpc>
-            </a:pPr>
-            <a:r>
-              <a:rPr sz="900" b="0">
+                <a:spcPct val="100000"/>
+              </a:lnSpc>
+              <a:spcBef>
+                <a:spcPts val="0"/>
+              </a:spcBef>
+              <a:spcAft>
+                <a:spcPts val="0"/>
+              </a:spcAft>
+            </a:pPr>
+            <a:r>
+              <a:rPr sz="800" b="0">
                 <a:solidFill>
                   <a:srgbClr val="F5F1E8"/>
                 </a:solidFill>
@@ -6669,11 +6681,17 @@
           <a:p>
             <a:pPr algn="l">
               <a:lnSpc>
-                <a:spcPct val="130000"/>
-              </a:lnSpc>
-            </a:pPr>
-            <a:r>
-              <a:rPr sz="900" b="0">
+                <a:spcPct val="100000"/>
+              </a:lnSpc>
+              <a:spcBef>
+                <a:spcPts val="0"/>
+              </a:spcBef>
+              <a:spcAft>
+                <a:spcPts val="0"/>
+              </a:spcAft>
+            </a:pPr>
+            <a:r>
+              <a:rPr sz="800" b="0">
                 <a:solidFill>
                   <a:srgbClr val="F5F1E8"/>
                 </a:solidFill>
@@ -6758,11 +6776,17 @@
           <a:p>
             <a:pPr algn="l">
               <a:lnSpc>
-                <a:spcPct val="130000"/>
-              </a:lnSpc>
-            </a:pPr>
-            <a:r>
-              <a:rPr sz="900" b="1">
+                <a:spcPct val="100000"/>
+              </a:lnSpc>
+              <a:spcBef>
+                <a:spcPts val="0"/>
+              </a:spcBef>
+              <a:spcAft>
+                <a:spcPts val="0"/>
+              </a:spcAft>
+            </a:pPr>
+            <a:r>
+              <a:rPr sz="800" b="1">
                 <a:solidFill>
                   <a:srgbClr val="D4B896"/>
                 </a:solidFill>
@@ -6850,7 +6874,7 @@
               </a:lnSpc>
             </a:pPr>
             <a:r>
-              <a:rPr sz="900" b="1">
+              <a:rPr sz="800" b="1">
                 <a:solidFill>
                   <a:srgbClr val="B8956A"/>
                 </a:solidFill>
@@ -6933,11 +6957,17 @@
           <a:p>
             <a:pPr algn="l">
               <a:lnSpc>
-                <a:spcPct val="130000"/>
-              </a:lnSpc>
-            </a:pPr>
-            <a:r>
-              <a:rPr sz="900" b="0">
+                <a:spcPct val="100000"/>
+              </a:lnSpc>
+              <a:spcBef>
+                <a:spcPts val="0"/>
+              </a:spcBef>
+              <a:spcAft>
+                <a:spcPts val="0"/>
+              </a:spcAft>
+            </a:pPr>
+            <a:r>
+              <a:rPr sz="800" b="0">
                 <a:solidFill>
                   <a:srgbClr val="F5F1E8"/>
                 </a:solidFill>
@@ -7021,11 +7051,17 @@
           <a:p>
             <a:pPr algn="l">
               <a:lnSpc>
-                <a:spcPct val="130000"/>
-              </a:lnSpc>
-            </a:pPr>
-            <a:r>
-              <a:rPr sz="900" b="0">
+                <a:spcPct val="100000"/>
+              </a:lnSpc>
+              <a:spcBef>
+                <a:spcPts val="0"/>
+              </a:spcBef>
+              <a:spcAft>
+                <a:spcPts val="0"/>
+              </a:spcAft>
+            </a:pPr>
+            <a:r>
+              <a:rPr sz="800" b="0">
                 <a:solidFill>
                   <a:srgbClr val="F5F1E8"/>
                 </a:solidFill>
@@ -7109,11 +7145,17 @@
           <a:p>
             <a:pPr algn="l">
               <a:lnSpc>
-                <a:spcPct val="130000"/>
-              </a:lnSpc>
-            </a:pPr>
-            <a:r>
-              <a:rPr sz="900" b="0">
+                <a:spcPct val="100000"/>
+              </a:lnSpc>
+              <a:spcBef>
+                <a:spcPts val="0"/>
+              </a:spcBef>
+              <a:spcAft>
+                <a:spcPts val="0"/>
+              </a:spcAft>
+            </a:pPr>
+            <a:r>
+              <a:rPr sz="800" b="0">
                 <a:solidFill>
                   <a:srgbClr val="F5F1E8"/>
                 </a:solidFill>
@@ -7197,11 +7239,17 @@
           <a:p>
             <a:pPr algn="l">
               <a:lnSpc>
-                <a:spcPct val="130000"/>
-              </a:lnSpc>
-            </a:pPr>
-            <a:r>
-              <a:rPr sz="900" b="1">
+                <a:spcPct val="100000"/>
+              </a:lnSpc>
+              <a:spcBef>
+                <a:spcPts val="0"/>
+              </a:spcBef>
+              <a:spcAft>
+                <a:spcPts val="0"/>
+              </a:spcAft>
+            </a:pPr>
+            <a:r>
+              <a:rPr sz="800" b="1">
                 <a:solidFill>
                   <a:srgbClr val="D4B896"/>
                 </a:solidFill>
@@ -7289,7 +7337,7 @@
               </a:lnSpc>
             </a:pPr>
             <a:r>
-              <a:rPr sz="900" b="1">
+              <a:rPr sz="800" b="1">
                 <a:solidFill>
                   <a:srgbClr val="B8956A"/>
                 </a:solidFill>
@@ -7372,11 +7420,17 @@
           <a:p>
             <a:pPr algn="l">
               <a:lnSpc>
-                <a:spcPct val="130000"/>
-              </a:lnSpc>
-            </a:pPr>
-            <a:r>
-              <a:rPr sz="900" b="0">
+                <a:spcPct val="100000"/>
+              </a:lnSpc>
+              <a:spcBef>
+                <a:spcPts val="0"/>
+              </a:spcBef>
+              <a:spcAft>
+                <a:spcPts val="0"/>
+              </a:spcAft>
+            </a:pPr>
+            <a:r>
+              <a:rPr sz="800" b="0">
                 <a:solidFill>
                   <a:srgbClr val="F5F1E8"/>
                 </a:solidFill>
@@ -7460,11 +7514,17 @@
           <a:p>
             <a:pPr algn="l">
               <a:lnSpc>
-                <a:spcPct val="130000"/>
-              </a:lnSpc>
-            </a:pPr>
-            <a:r>
-              <a:rPr sz="900" b="0">
+                <a:spcPct val="100000"/>
+              </a:lnSpc>
+              <a:spcBef>
+                <a:spcPts val="0"/>
+              </a:spcBef>
+              <a:spcAft>
+                <a:spcPts val="0"/>
+              </a:spcAft>
+            </a:pPr>
+            <a:r>
+              <a:rPr sz="800" b="0">
                 <a:solidFill>
                   <a:srgbClr val="F5F1E8"/>
                 </a:solidFill>
@@ -7548,11 +7608,17 @@
           <a:p>
             <a:pPr algn="l">
               <a:lnSpc>
-                <a:spcPct val="130000"/>
-              </a:lnSpc>
-            </a:pPr>
-            <a:r>
-              <a:rPr sz="900" b="0">
+                <a:spcPct val="100000"/>
+              </a:lnSpc>
+              <a:spcBef>
+                <a:spcPts val="0"/>
+              </a:spcBef>
+              <a:spcAft>
+                <a:spcPts val="0"/>
+              </a:spcAft>
+            </a:pPr>
+            <a:r>
+              <a:rPr sz="800" b="0">
                 <a:solidFill>
                   <a:srgbClr val="F5F1E8"/>
                 </a:solidFill>
@@ -7636,11 +7702,17 @@
           <a:p>
             <a:pPr algn="l">
               <a:lnSpc>
-                <a:spcPct val="130000"/>
-              </a:lnSpc>
-            </a:pPr>
-            <a:r>
-              <a:rPr sz="900" b="1">
+                <a:spcPct val="100000"/>
+              </a:lnSpc>
+              <a:spcBef>
+                <a:spcPts val="0"/>
+              </a:spcBef>
+              <a:spcAft>
+                <a:spcPts val="0"/>
+              </a:spcAft>
+            </a:pPr>
+            <a:r>
+              <a:rPr sz="800" b="1">
                 <a:solidFill>
                   <a:srgbClr val="D4B896"/>
                 </a:solidFill>
@@ -7728,7 +7800,7 @@
               </a:lnSpc>
             </a:pPr>
             <a:r>
-              <a:rPr sz="900" b="1">
+              <a:rPr sz="800" b="1">
                 <a:solidFill>
                   <a:srgbClr val="B8956A"/>
                 </a:solidFill>
@@ -7811,11 +7883,17 @@
           <a:p>
             <a:pPr algn="l">
               <a:lnSpc>
-                <a:spcPct val="130000"/>
-              </a:lnSpc>
-            </a:pPr>
-            <a:r>
-              <a:rPr sz="900" b="0">
+                <a:spcPct val="100000"/>
+              </a:lnSpc>
+              <a:spcBef>
+                <a:spcPts val="0"/>
+              </a:spcBef>
+              <a:spcAft>
+                <a:spcPts val="0"/>
+              </a:spcAft>
+            </a:pPr>
+            <a:r>
+              <a:rPr sz="800" b="0">
                 <a:solidFill>
                   <a:srgbClr val="F5F1E8"/>
                 </a:solidFill>
@@ -7899,11 +7977,17 @@
           <a:p>
             <a:pPr algn="l">
               <a:lnSpc>
-                <a:spcPct val="130000"/>
-              </a:lnSpc>
-            </a:pPr>
-            <a:r>
-              <a:rPr sz="900" b="0">
+                <a:spcPct val="100000"/>
+              </a:lnSpc>
+              <a:spcBef>
+                <a:spcPts val="0"/>
+              </a:spcBef>
+              <a:spcAft>
+                <a:spcPts val="0"/>
+              </a:spcAft>
+            </a:pPr>
+            <a:r>
+              <a:rPr sz="800" b="0">
                 <a:solidFill>
                   <a:srgbClr val="F5F1E8"/>
                 </a:solidFill>
@@ -7987,11 +8071,17 @@
           <a:p>
             <a:pPr algn="l">
               <a:lnSpc>
-                <a:spcPct val="130000"/>
-              </a:lnSpc>
-            </a:pPr>
-            <a:r>
-              <a:rPr sz="900" b="0">
+                <a:spcPct val="100000"/>
+              </a:lnSpc>
+              <a:spcBef>
+                <a:spcPts val="0"/>
+              </a:spcBef>
+              <a:spcAft>
+                <a:spcPts val="0"/>
+              </a:spcAft>
+            </a:pPr>
+            <a:r>
+              <a:rPr sz="800" b="0">
                 <a:solidFill>
                   <a:srgbClr val="F5F1E8"/>
                 </a:solidFill>
@@ -8076,11 +8166,17 @@
           <a:p>
             <a:pPr algn="l">
               <a:lnSpc>
-                <a:spcPct val="130000"/>
-              </a:lnSpc>
-            </a:pPr>
-            <a:r>
-              <a:rPr sz="900" b="1">
+                <a:spcPct val="100000"/>
+              </a:lnSpc>
+              <a:spcBef>
+                <a:spcPts val="0"/>
+              </a:spcBef>
+              <a:spcAft>
+                <a:spcPts val="0"/>
+              </a:spcAft>
+            </a:pPr>
+            <a:r>
+              <a:rPr sz="800" b="1">
                 <a:solidFill>
                   <a:srgbClr val="D4B896"/>
                 </a:solidFill>
@@ -8168,7 +8264,7 @@
               </a:lnSpc>
             </a:pPr>
             <a:r>
-              <a:rPr sz="900" b="1">
+              <a:rPr sz="800" b="1">
                 <a:solidFill>
                   <a:srgbClr val="B8956A"/>
                 </a:solidFill>
@@ -8255,7 +8351,7 @@
               </a:lnSpc>
             </a:pPr>
             <a:r>
-              <a:rPr sz="900" b="0">
+              <a:rPr sz="800" b="0">
                 <a:solidFill>
                   <a:srgbClr val="F5F1E8"/>
                 </a:solidFill>
@@ -8338,11 +8434,17 @@
           <a:p>
             <a:pPr algn="l">
               <a:lnSpc>
-                <a:spcPct val="130000"/>
-              </a:lnSpc>
-            </a:pPr>
-            <a:r>
-              <a:rPr sz="900" b="0">
+                <a:spcPct val="100000"/>
+              </a:lnSpc>
+              <a:spcBef>
+                <a:spcPts val="0"/>
+              </a:spcBef>
+              <a:spcAft>
+                <a:spcPts val="0"/>
+              </a:spcAft>
+            </a:pPr>
+            <a:r>
+              <a:rPr sz="800" b="0">
                 <a:solidFill>
                   <a:srgbClr val="F5F1E8"/>
                 </a:solidFill>
@@ -8426,11 +8528,17 @@
           <a:p>
             <a:pPr algn="l">
               <a:lnSpc>
-                <a:spcPct val="130000"/>
-              </a:lnSpc>
-            </a:pPr>
-            <a:r>
-              <a:rPr sz="900" b="0">
+                <a:spcPct val="100000"/>
+              </a:lnSpc>
+              <a:spcBef>
+                <a:spcPts val="0"/>
+              </a:spcBef>
+              <a:spcAft>
+                <a:spcPts val="0"/>
+              </a:spcAft>
+            </a:pPr>
+            <a:r>
+              <a:rPr sz="800" b="0">
                 <a:solidFill>
                   <a:srgbClr val="F5F1E8"/>
                 </a:solidFill>
@@ -8514,11 +8622,17 @@
           <a:p>
             <a:pPr algn="l">
               <a:lnSpc>
-                <a:spcPct val="130000"/>
-              </a:lnSpc>
-            </a:pPr>
-            <a:r>
-              <a:rPr sz="900" b="1">
+                <a:spcPct val="100000"/>
+              </a:lnSpc>
+              <a:spcBef>
+                <a:spcPts val="0"/>
+              </a:spcBef>
+              <a:spcAft>
+                <a:spcPts val="0"/>
+              </a:spcAft>
+            </a:pPr>
+            <a:r>
+              <a:rPr sz="800" b="1">
                 <a:solidFill>
                   <a:srgbClr val="D4B896"/>
                 </a:solidFill>
@@ -8606,7 +8720,7 @@
               </a:lnSpc>
             </a:pPr>
             <a:r>
-              <a:rPr sz="900" b="1">
+              <a:rPr sz="800" b="1">
                 <a:solidFill>
                   <a:srgbClr val="B8956A"/>
                 </a:solidFill>
@@ -8689,11 +8803,17 @@
           <a:p>
             <a:pPr algn="l">
               <a:lnSpc>
-                <a:spcPct val="130000"/>
-              </a:lnSpc>
-            </a:pPr>
-            <a:r>
-              <a:rPr sz="900" b="0">
+                <a:spcPct val="100000"/>
+              </a:lnSpc>
+              <a:spcBef>
+                <a:spcPts val="0"/>
+              </a:spcBef>
+              <a:spcAft>
+                <a:spcPts val="0"/>
+              </a:spcAft>
+            </a:pPr>
+            <a:r>
+              <a:rPr sz="800" b="0">
                 <a:solidFill>
                   <a:srgbClr val="F5F1E8"/>
                 </a:solidFill>
@@ -8777,11 +8897,17 @@
           <a:p>
             <a:pPr algn="l">
               <a:lnSpc>
-                <a:spcPct val="130000"/>
-              </a:lnSpc>
-            </a:pPr>
-            <a:r>
-              <a:rPr sz="900" b="0">
+                <a:spcPct val="100000"/>
+              </a:lnSpc>
+              <a:spcBef>
+                <a:spcPts val="0"/>
+              </a:spcBef>
+              <a:spcAft>
+                <a:spcPts val="0"/>
+              </a:spcAft>
+            </a:pPr>
+            <a:r>
+              <a:rPr sz="800" b="0">
                 <a:solidFill>
                   <a:srgbClr val="F5F1E8"/>
                 </a:solidFill>
@@ -8865,11 +8991,17 @@
           <a:p>
             <a:pPr algn="l">
               <a:lnSpc>
-                <a:spcPct val="130000"/>
-              </a:lnSpc>
-            </a:pPr>
-            <a:r>
-              <a:rPr sz="900" b="0">
+                <a:spcPct val="100000"/>
+              </a:lnSpc>
+              <a:spcBef>
+                <a:spcPts val="0"/>
+              </a:spcBef>
+              <a:spcAft>
+                <a:spcPts val="0"/>
+              </a:spcAft>
+            </a:pPr>
+            <a:r>
+              <a:rPr sz="800" b="0">
                 <a:solidFill>
                   <a:srgbClr val="F5F1E8"/>
                 </a:solidFill>
@@ -8954,11 +9086,17 @@
           <a:p>
             <a:pPr algn="l">
               <a:lnSpc>
-                <a:spcPct val="130000"/>
-              </a:lnSpc>
-            </a:pPr>
-            <a:r>
-              <a:rPr sz="900" b="1">
+                <a:spcPct val="100000"/>
+              </a:lnSpc>
+              <a:spcBef>
+                <a:spcPts val="0"/>
+              </a:spcBef>
+              <a:spcAft>
+                <a:spcPts val="0"/>
+              </a:spcAft>
+            </a:pPr>
+            <a:r>
+              <a:rPr sz="800" b="1">
                 <a:solidFill>
                   <a:srgbClr val="D4B896"/>
                 </a:solidFill>
@@ -9111,7 +9249,7 @@
               </a:lnSpc>
             </a:pPr>
             <a:r>
-              <a:rPr sz="900" b="0">
+              <a:rPr sz="800" b="0">
                 <a:solidFill>
                   <a:srgbClr val="6E685C"/>
                 </a:solidFill>
@@ -10641,26 +10779,32 @@
         <p:spPr>
           <a:xfrm>
             <a:off x="5943600" y="5989320"/>
-            <a:ext cx="5486400" cy="274320"/>
-          </a:xfrm>
-          <a:prstGeom prst="rect">
-            <a:avLst/>
-          </a:prstGeom>
-          <a:noFill/>
-        </p:spPr>
-        <p:txBody>
-          <a:bodyPr wrap="square" lIns="0" rIns="0" tIns="0" bIns="0" anchor="t">
-            <a:spAutoFit/>
-          </a:bodyPr>
-          <a:lstStyle/>
-          <a:p>
-            <a:pPr algn="l">
-              <a:lnSpc>
-                <a:spcPct val="120000"/>
-              </a:lnSpc>
-            </a:pPr>
-            <a:r>
-              <a:rPr sz="1000" b="1">
+            <a:ext cx="5486400" cy="365760"/>
+          </a:xfrm>
+          <a:prstGeom prst="rect">
+            <a:avLst/>
+          </a:prstGeom>
+          <a:noFill/>
+        </p:spPr>
+        <p:txBody>
+          <a:bodyPr wrap="square" lIns="0" rIns="0" tIns="0" bIns="0" anchor="t">
+            <a:spAutoFit/>
+          </a:bodyPr>
+          <a:lstStyle/>
+          <a:p>
+            <a:pPr algn="l">
+              <a:lnSpc>
+                <a:spcPct val="100000"/>
+              </a:lnSpc>
+              <a:spcBef>
+                <a:spcPts val="0"/>
+              </a:spcBef>
+              <a:spcAft>
+                <a:spcPts val="0"/>
+              </a:spcAft>
+            </a:pPr>
+            <a:r>
+              <a:rPr sz="900" b="1">
                 <a:solidFill>
                   <a:srgbClr val="D4B896"/>
                 </a:solidFill>
@@ -13688,7 +13832,7 @@
         <p:spPr>
           <a:xfrm>
             <a:off x="9052560" y="3822191"/>
-            <a:ext cx="2468880" cy="274320"/>
+            <a:ext cx="2468880" cy="320040"/>
           </a:xfrm>
           <a:prstGeom prst="rect">
             <a:avLst/>
@@ -13703,7 +13847,7 @@
           <a:p>
             <a:pPr algn="r">
               <a:lnSpc>
-                <a:spcPct val="120000"/>
+                <a:spcPct val="100000"/>
               </a:lnSpc>
             </a:pPr>
             <a:r>
@@ -14532,7 +14676,7 @@
               </a:lnSpc>
             </a:pPr>
             <a:r>
-              <a:rPr sz="1000" b="1">
+              <a:rPr sz="800" b="1">
                 <a:solidFill>
                   <a:srgbClr val="B8956A"/>
                 </a:solidFill>
@@ -14819,7 +14963,7 @@
               </a:lnSpc>
             </a:pPr>
             <a:r>
-              <a:rPr sz="1050" b="1">
+              <a:rPr sz="800" b="1">
                 <a:solidFill>
                   <a:srgbClr val="F5F1E8"/>
                 </a:solidFill>
@@ -14906,7 +15050,7 @@
               </a:lnSpc>
             </a:pPr>
             <a:r>
-              <a:rPr sz="1050" b="1">
+              <a:rPr sz="800" b="1">
                 <a:solidFill>
                   <a:srgbClr val="F5F1E8"/>
                 </a:solidFill>
@@ -14993,7 +15137,7 @@
               </a:lnSpc>
             </a:pPr>
             <a:r>
-              <a:rPr sz="1050" b="1">
+              <a:rPr sz="800" b="1">
                 <a:solidFill>
                   <a:srgbClr val="F5F1E8"/>
                 </a:solidFill>
@@ -15080,7 +15224,7 @@
               </a:lnSpc>
             </a:pPr>
             <a:r>
-              <a:rPr sz="1050" b="1">
+              <a:rPr sz="800" b="1">
                 <a:solidFill>
                   <a:srgbClr val="D4B896"/>
                 </a:solidFill>
@@ -15167,7 +15311,7 @@
               </a:lnSpc>
             </a:pPr>
             <a:r>
-              <a:rPr sz="900" b="1">
+              <a:rPr sz="800" b="1">
                 <a:solidFill>
                   <a:srgbClr val="B8956A"/>
                 </a:solidFill>
@@ -15250,11 +15394,17 @@
           <a:p>
             <a:pPr algn="l">
               <a:lnSpc>
-                <a:spcPct val="130000"/>
-              </a:lnSpc>
-            </a:pPr>
-            <a:r>
-              <a:rPr sz="900" b="0">
+                <a:spcPct val="100000"/>
+              </a:lnSpc>
+              <a:spcBef>
+                <a:spcPts val="0"/>
+              </a:spcBef>
+              <a:spcAft>
+                <a:spcPts val="0"/>
+              </a:spcAft>
+            </a:pPr>
+            <a:r>
+              <a:rPr sz="800" b="0">
                 <a:solidFill>
                   <a:srgbClr val="F5F1E8"/>
                 </a:solidFill>
@@ -15338,11 +15488,17 @@
           <a:p>
             <a:pPr algn="l">
               <a:lnSpc>
-                <a:spcPct val="130000"/>
-              </a:lnSpc>
-            </a:pPr>
-            <a:r>
-              <a:rPr sz="900" b="0">
+                <a:spcPct val="100000"/>
+              </a:lnSpc>
+              <a:spcBef>
+                <a:spcPts val="0"/>
+              </a:spcBef>
+              <a:spcAft>
+                <a:spcPts val="0"/>
+              </a:spcAft>
+            </a:pPr>
+            <a:r>
+              <a:rPr sz="800" b="0">
                 <a:solidFill>
                   <a:srgbClr val="F5F1E8"/>
                 </a:solidFill>
@@ -15426,11 +15582,17 @@
           <a:p>
             <a:pPr algn="l">
               <a:lnSpc>
-                <a:spcPct val="130000"/>
-              </a:lnSpc>
-            </a:pPr>
-            <a:r>
-              <a:rPr sz="900" b="0">
+                <a:spcPct val="100000"/>
+              </a:lnSpc>
+              <a:spcBef>
+                <a:spcPts val="0"/>
+              </a:spcBef>
+              <a:spcAft>
+                <a:spcPts val="0"/>
+              </a:spcAft>
+            </a:pPr>
+            <a:r>
+              <a:rPr sz="800" b="0">
                 <a:solidFill>
                   <a:srgbClr val="F5F1E8"/>
                 </a:solidFill>
@@ -15515,11 +15677,17 @@
           <a:p>
             <a:pPr algn="l">
               <a:lnSpc>
-                <a:spcPct val="130000"/>
-              </a:lnSpc>
-            </a:pPr>
-            <a:r>
-              <a:rPr sz="900" b="1">
+                <a:spcPct val="100000"/>
+              </a:lnSpc>
+              <a:spcBef>
+                <a:spcPts val="0"/>
+              </a:spcBef>
+              <a:spcAft>
+                <a:spcPts val="0"/>
+              </a:spcAft>
+            </a:pPr>
+            <a:r>
+              <a:rPr sz="800" b="1">
                 <a:solidFill>
                   <a:srgbClr val="D4B896"/>
                 </a:solidFill>
@@ -15607,7 +15775,7 @@
               </a:lnSpc>
             </a:pPr>
             <a:r>
-              <a:rPr sz="900" b="1">
+              <a:rPr sz="800" b="1">
                 <a:solidFill>
                   <a:srgbClr val="B8956A"/>
                 </a:solidFill>
@@ -15690,11 +15858,17 @@
           <a:p>
             <a:pPr algn="l">
               <a:lnSpc>
-                <a:spcPct val="130000"/>
-              </a:lnSpc>
-            </a:pPr>
-            <a:r>
-              <a:rPr sz="900" b="0">
+                <a:spcPct val="100000"/>
+              </a:lnSpc>
+              <a:spcBef>
+                <a:spcPts val="0"/>
+              </a:spcBef>
+              <a:spcAft>
+                <a:spcPts val="0"/>
+              </a:spcAft>
+            </a:pPr>
+            <a:r>
+              <a:rPr sz="800" b="0">
                 <a:solidFill>
                   <a:srgbClr val="F5F1E8"/>
                 </a:solidFill>
@@ -15778,11 +15952,17 @@
           <a:p>
             <a:pPr algn="l">
               <a:lnSpc>
-                <a:spcPct val="130000"/>
-              </a:lnSpc>
-            </a:pPr>
-            <a:r>
-              <a:rPr sz="900" b="0">
+                <a:spcPct val="100000"/>
+              </a:lnSpc>
+              <a:spcBef>
+                <a:spcPts val="0"/>
+              </a:spcBef>
+              <a:spcAft>
+                <a:spcPts val="0"/>
+              </a:spcAft>
+            </a:pPr>
+            <a:r>
+              <a:rPr sz="800" b="0">
                 <a:solidFill>
                   <a:srgbClr val="F5F1E8"/>
                 </a:solidFill>
@@ -15866,11 +16046,17 @@
           <a:p>
             <a:pPr algn="l">
               <a:lnSpc>
-                <a:spcPct val="130000"/>
-              </a:lnSpc>
-            </a:pPr>
-            <a:r>
-              <a:rPr sz="900" b="0">
+                <a:spcPct val="100000"/>
+              </a:lnSpc>
+              <a:spcBef>
+                <a:spcPts val="0"/>
+              </a:spcBef>
+              <a:spcAft>
+                <a:spcPts val="0"/>
+              </a:spcAft>
+            </a:pPr>
+            <a:r>
+              <a:rPr sz="800" b="0">
                 <a:solidFill>
                   <a:srgbClr val="F5F1E8"/>
                 </a:solidFill>
@@ -15955,11 +16141,17 @@
           <a:p>
             <a:pPr algn="l">
               <a:lnSpc>
-                <a:spcPct val="130000"/>
-              </a:lnSpc>
-            </a:pPr>
-            <a:r>
-              <a:rPr sz="900" b="1">
+                <a:spcPct val="100000"/>
+              </a:lnSpc>
+              <a:spcBef>
+                <a:spcPts val="0"/>
+              </a:spcBef>
+              <a:spcAft>
+                <a:spcPts val="0"/>
+              </a:spcAft>
+            </a:pPr>
+            <a:r>
+              <a:rPr sz="800" b="1">
                 <a:solidFill>
                   <a:srgbClr val="D4B896"/>
                 </a:solidFill>
@@ -16047,7 +16239,7 @@
               </a:lnSpc>
             </a:pPr>
             <a:r>
-              <a:rPr sz="900" b="1">
+              <a:rPr sz="800" b="1">
                 <a:solidFill>
                   <a:srgbClr val="B8956A"/>
                 </a:solidFill>
@@ -16130,11 +16322,17 @@
           <a:p>
             <a:pPr algn="l">
               <a:lnSpc>
-                <a:spcPct val="130000"/>
-              </a:lnSpc>
-            </a:pPr>
-            <a:r>
-              <a:rPr sz="900" b="0">
+                <a:spcPct val="100000"/>
+              </a:lnSpc>
+              <a:spcBef>
+                <a:spcPts val="0"/>
+              </a:spcBef>
+              <a:spcAft>
+                <a:spcPts val="0"/>
+              </a:spcAft>
+            </a:pPr>
+            <a:r>
+              <a:rPr sz="800" b="0">
                 <a:solidFill>
                   <a:srgbClr val="F5F1E8"/>
                 </a:solidFill>
@@ -16218,11 +16416,17 @@
           <a:p>
             <a:pPr algn="l">
               <a:lnSpc>
-                <a:spcPct val="130000"/>
-              </a:lnSpc>
-            </a:pPr>
-            <a:r>
-              <a:rPr sz="900" b="0">
+                <a:spcPct val="100000"/>
+              </a:lnSpc>
+              <a:spcBef>
+                <a:spcPts val="0"/>
+              </a:spcBef>
+              <a:spcAft>
+                <a:spcPts val="0"/>
+              </a:spcAft>
+            </a:pPr>
+            <a:r>
+              <a:rPr sz="800" b="0">
                 <a:solidFill>
                   <a:srgbClr val="F5F1E8"/>
                 </a:solidFill>
@@ -16306,11 +16510,17 @@
           <a:p>
             <a:pPr algn="l">
               <a:lnSpc>
-                <a:spcPct val="130000"/>
-              </a:lnSpc>
-            </a:pPr>
-            <a:r>
-              <a:rPr sz="900" b="0">
+                <a:spcPct val="100000"/>
+              </a:lnSpc>
+              <a:spcBef>
+                <a:spcPts val="0"/>
+              </a:spcBef>
+              <a:spcAft>
+                <a:spcPts val="0"/>
+              </a:spcAft>
+            </a:pPr>
+            <a:r>
+              <a:rPr sz="800" b="0">
                 <a:solidFill>
                   <a:srgbClr val="F5F1E8"/>
                 </a:solidFill>
@@ -16395,11 +16605,17 @@
           <a:p>
             <a:pPr algn="l">
               <a:lnSpc>
-                <a:spcPct val="130000"/>
-              </a:lnSpc>
-            </a:pPr>
-            <a:r>
-              <a:rPr sz="900" b="1">
+                <a:spcPct val="100000"/>
+              </a:lnSpc>
+              <a:spcBef>
+                <a:spcPts val="0"/>
+              </a:spcBef>
+              <a:spcAft>
+                <a:spcPts val="0"/>
+              </a:spcAft>
+            </a:pPr>
+            <a:r>
+              <a:rPr sz="800" b="1">
                 <a:solidFill>
                   <a:srgbClr val="D4B896"/>
                 </a:solidFill>
@@ -16487,7 +16703,7 @@
               </a:lnSpc>
             </a:pPr>
             <a:r>
-              <a:rPr sz="900" b="1">
+              <a:rPr sz="800" b="1">
                 <a:solidFill>
                   <a:srgbClr val="B8956A"/>
                 </a:solidFill>
@@ -16570,11 +16786,17 @@
           <a:p>
             <a:pPr algn="l">
               <a:lnSpc>
-                <a:spcPct val="130000"/>
-              </a:lnSpc>
-            </a:pPr>
-            <a:r>
-              <a:rPr sz="900" b="0">
+                <a:spcPct val="100000"/>
+              </a:lnSpc>
+              <a:spcBef>
+                <a:spcPts val="0"/>
+              </a:spcBef>
+              <a:spcAft>
+                <a:spcPts val="0"/>
+              </a:spcAft>
+            </a:pPr>
+            <a:r>
+              <a:rPr sz="800" b="0">
                 <a:solidFill>
                   <a:srgbClr val="F5F1E8"/>
                 </a:solidFill>
@@ -16658,11 +16880,17 @@
           <a:p>
             <a:pPr algn="l">
               <a:lnSpc>
-                <a:spcPct val="130000"/>
-              </a:lnSpc>
-            </a:pPr>
-            <a:r>
-              <a:rPr sz="900" b="0">
+                <a:spcPct val="100000"/>
+              </a:lnSpc>
+              <a:spcBef>
+                <a:spcPts val="0"/>
+              </a:spcBef>
+              <a:spcAft>
+                <a:spcPts val="0"/>
+              </a:spcAft>
+            </a:pPr>
+            <a:r>
+              <a:rPr sz="800" b="0">
                 <a:solidFill>
                   <a:srgbClr val="F5F1E8"/>
                 </a:solidFill>
@@ -16746,11 +16974,17 @@
           <a:p>
             <a:pPr algn="l">
               <a:lnSpc>
-                <a:spcPct val="130000"/>
-              </a:lnSpc>
-            </a:pPr>
-            <a:r>
-              <a:rPr sz="900" b="0">
+                <a:spcPct val="100000"/>
+              </a:lnSpc>
+              <a:spcBef>
+                <a:spcPts val="0"/>
+              </a:spcBef>
+              <a:spcAft>
+                <a:spcPts val="0"/>
+              </a:spcAft>
+            </a:pPr>
+            <a:r>
+              <a:rPr sz="800" b="0">
                 <a:solidFill>
                   <a:srgbClr val="F5F1E8"/>
                 </a:solidFill>
@@ -16834,11 +17068,17 @@
           <a:p>
             <a:pPr algn="l">
               <a:lnSpc>
-                <a:spcPct val="130000"/>
-              </a:lnSpc>
-            </a:pPr>
-            <a:r>
-              <a:rPr sz="900" b="1">
+                <a:spcPct val="100000"/>
+              </a:lnSpc>
+              <a:spcBef>
+                <a:spcPts val="0"/>
+              </a:spcBef>
+              <a:spcAft>
+                <a:spcPts val="0"/>
+              </a:spcAft>
+            </a:pPr>
+            <a:r>
+              <a:rPr sz="800" b="1">
                 <a:solidFill>
                   <a:srgbClr val="D4B896"/>
                 </a:solidFill>
@@ -16926,7 +17166,7 @@
               </a:lnSpc>
             </a:pPr>
             <a:r>
-              <a:rPr sz="900" b="1">
+              <a:rPr sz="800" b="1">
                 <a:solidFill>
                   <a:srgbClr val="B8956A"/>
                 </a:solidFill>
@@ -17009,11 +17249,17 @@
           <a:p>
             <a:pPr algn="l">
               <a:lnSpc>
-                <a:spcPct val="130000"/>
-              </a:lnSpc>
-            </a:pPr>
-            <a:r>
-              <a:rPr sz="900" b="0">
+                <a:spcPct val="100000"/>
+              </a:lnSpc>
+              <a:spcBef>
+                <a:spcPts val="0"/>
+              </a:spcBef>
+              <a:spcAft>
+                <a:spcPts val="0"/>
+              </a:spcAft>
+            </a:pPr>
+            <a:r>
+              <a:rPr sz="800" b="0">
                 <a:solidFill>
                   <a:srgbClr val="F5F1E8"/>
                 </a:solidFill>
@@ -17097,11 +17343,17 @@
           <a:p>
             <a:pPr algn="l">
               <a:lnSpc>
-                <a:spcPct val="130000"/>
-              </a:lnSpc>
-            </a:pPr>
-            <a:r>
-              <a:rPr sz="900" b="0">
+                <a:spcPct val="100000"/>
+              </a:lnSpc>
+              <a:spcBef>
+                <a:spcPts val="0"/>
+              </a:spcBef>
+              <a:spcAft>
+                <a:spcPts val="0"/>
+              </a:spcAft>
+            </a:pPr>
+            <a:r>
+              <a:rPr sz="800" b="0">
                 <a:solidFill>
                   <a:srgbClr val="F5F1E8"/>
                 </a:solidFill>
@@ -17186,11 +17438,17 @@
           <a:p>
             <a:pPr algn="l">
               <a:lnSpc>
-                <a:spcPct val="130000"/>
-              </a:lnSpc>
-            </a:pPr>
-            <a:r>
-              <a:rPr sz="900" b="0">
+                <a:spcPct val="100000"/>
+              </a:lnSpc>
+              <a:spcBef>
+                <a:spcPts val="0"/>
+              </a:spcBef>
+              <a:spcAft>
+                <a:spcPts val="0"/>
+              </a:spcAft>
+            </a:pPr>
+            <a:r>
+              <a:rPr sz="800" b="0">
                 <a:solidFill>
                   <a:srgbClr val="F5F1E8"/>
                 </a:solidFill>
@@ -17275,11 +17533,17 @@
           <a:p>
             <a:pPr algn="l">
               <a:lnSpc>
-                <a:spcPct val="130000"/>
-              </a:lnSpc>
-            </a:pPr>
-            <a:r>
-              <a:rPr sz="900" b="1">
+                <a:spcPct val="100000"/>
+              </a:lnSpc>
+              <a:spcBef>
+                <a:spcPts val="0"/>
+              </a:spcBef>
+              <a:spcAft>
+                <a:spcPts val="0"/>
+              </a:spcAft>
+            </a:pPr>
+            <a:r>
+              <a:rPr sz="800" b="1">
                 <a:solidFill>
                   <a:srgbClr val="D4B896"/>
                 </a:solidFill>
@@ -17368,7 +17632,7 @@
               </a:lnSpc>
             </a:pPr>
             <a:r>
-              <a:rPr sz="900" b="1">
+              <a:rPr sz="800" b="1">
                 <a:solidFill>
                   <a:srgbClr val="B8956A"/>
                 </a:solidFill>
@@ -17451,11 +17715,17 @@
           <a:p>
             <a:pPr algn="l">
               <a:lnSpc>
-                <a:spcPct val="130000"/>
-              </a:lnSpc>
-            </a:pPr>
-            <a:r>
-              <a:rPr sz="900" b="0">
+                <a:spcPct val="100000"/>
+              </a:lnSpc>
+              <a:spcBef>
+                <a:spcPts val="0"/>
+              </a:spcBef>
+              <a:spcAft>
+                <a:spcPts val="0"/>
+              </a:spcAft>
+            </a:pPr>
+            <a:r>
+              <a:rPr sz="800" b="0">
                 <a:solidFill>
                   <a:srgbClr val="F5F1E8"/>
                 </a:solidFill>
@@ -17539,11 +17809,17 @@
           <a:p>
             <a:pPr algn="l">
               <a:lnSpc>
-                <a:spcPct val="130000"/>
-              </a:lnSpc>
-            </a:pPr>
-            <a:r>
-              <a:rPr sz="900" b="0">
+                <a:spcPct val="100000"/>
+              </a:lnSpc>
+              <a:spcBef>
+                <a:spcPts val="0"/>
+              </a:spcBef>
+              <a:spcAft>
+                <a:spcPts val="0"/>
+              </a:spcAft>
+            </a:pPr>
+            <a:r>
+              <a:rPr sz="800" b="0">
                 <a:solidFill>
                   <a:srgbClr val="F5F1E8"/>
                 </a:solidFill>
@@ -17628,11 +17904,17 @@
           <a:p>
             <a:pPr algn="l">
               <a:lnSpc>
-                <a:spcPct val="130000"/>
-              </a:lnSpc>
-            </a:pPr>
-            <a:r>
-              <a:rPr sz="900" b="0">
+                <a:spcPct val="100000"/>
+              </a:lnSpc>
+              <a:spcBef>
+                <a:spcPts val="0"/>
+              </a:spcBef>
+              <a:spcAft>
+                <a:spcPts val="0"/>
+              </a:spcAft>
+            </a:pPr>
+            <a:r>
+              <a:rPr sz="800" b="0">
                 <a:solidFill>
                   <a:srgbClr val="F5F1E8"/>
                 </a:solidFill>
@@ -17717,11 +17999,17 @@
           <a:p>
             <a:pPr algn="l">
               <a:lnSpc>
-                <a:spcPct val="130000"/>
-              </a:lnSpc>
-            </a:pPr>
-            <a:r>
-              <a:rPr sz="900" b="1">
+                <a:spcPct val="100000"/>
+              </a:lnSpc>
+              <a:spcBef>
+                <a:spcPts val="0"/>
+              </a:spcBef>
+              <a:spcAft>
+                <a:spcPts val="0"/>
+              </a:spcAft>
+            </a:pPr>
+            <a:r>
+              <a:rPr sz="800" b="1">
                 <a:solidFill>
                   <a:srgbClr val="D4B896"/>
                 </a:solidFill>
@@ -17874,7 +18162,7 @@
               </a:lnSpc>
             </a:pPr>
             <a:r>
-              <a:rPr sz="900" b="0">
+              <a:rPr sz="800" b="0">
                 <a:solidFill>
                   <a:srgbClr val="6E685C"/>
                 </a:solidFill>
@@ -19204,26 +19492,32 @@
         <p:spPr>
           <a:xfrm>
             <a:off x="6583680" y="2706624"/>
-            <a:ext cx="4663440" cy="219456"/>
-          </a:xfrm>
-          <a:prstGeom prst="rect">
-            <a:avLst/>
-          </a:prstGeom>
-          <a:noFill/>
-        </p:spPr>
-        <p:txBody>
-          <a:bodyPr wrap="square" lIns="0" rIns="0" tIns="0" bIns="0" anchor="t">
-            <a:spAutoFit/>
-          </a:bodyPr>
-          <a:lstStyle/>
-          <a:p>
-            <a:pPr algn="l">
-              <a:lnSpc>
-                <a:spcPct val="120000"/>
-              </a:lnSpc>
-            </a:pPr>
-            <a:r>
-              <a:rPr sz="950" b="0">
+            <a:ext cx="4663440" cy="320040"/>
+          </a:xfrm>
+          <a:prstGeom prst="rect">
+            <a:avLst/>
+          </a:prstGeom>
+          <a:noFill/>
+        </p:spPr>
+        <p:txBody>
+          <a:bodyPr wrap="square" lIns="0" rIns="0" tIns="0" bIns="0" anchor="t">
+            <a:spAutoFit/>
+          </a:bodyPr>
+          <a:lstStyle/>
+          <a:p>
+            <a:pPr algn="l">
+              <a:lnSpc>
+                <a:spcPct val="100000"/>
+              </a:lnSpc>
+              <a:spcBef>
+                <a:spcPts val="0"/>
+              </a:spcBef>
+              <a:spcAft>
+                <a:spcPts val="0"/>
+              </a:spcAft>
+            </a:pPr>
+            <a:r>
+              <a:rPr sz="850" b="0">
                 <a:solidFill>
                   <a:srgbClr val="F5F1E8"/>
                 </a:solidFill>
@@ -21878,7 +22172,7 @@
               </a:lnSpc>
             </a:pPr>
             <a:r>
-              <a:rPr sz="1000" b="1">
+              <a:rPr sz="800" b="1">
                 <a:solidFill>
                   <a:srgbClr val="B8956A"/>
                 </a:solidFill>
@@ -22165,7 +22459,7 @@
               </a:lnSpc>
             </a:pPr>
             <a:r>
-              <a:rPr sz="1050" b="1">
+              <a:rPr sz="800" b="1">
                 <a:solidFill>
                   <a:srgbClr val="F5F1E8"/>
                 </a:solidFill>
@@ -22252,7 +22546,7 @@
               </a:lnSpc>
             </a:pPr>
             <a:r>
-              <a:rPr sz="1050" b="1">
+              <a:rPr sz="800" b="1">
                 <a:solidFill>
                   <a:srgbClr val="F5F1E8"/>
                 </a:solidFill>
@@ -22339,7 +22633,7 @@
               </a:lnSpc>
             </a:pPr>
             <a:r>
-              <a:rPr sz="1050" b="1">
+              <a:rPr sz="800" b="1">
                 <a:solidFill>
                   <a:srgbClr val="F5F1E8"/>
                 </a:solidFill>
@@ -22426,7 +22720,7 @@
               </a:lnSpc>
             </a:pPr>
             <a:r>
-              <a:rPr sz="1050" b="1">
+              <a:rPr sz="800" b="1">
                 <a:solidFill>
                   <a:srgbClr val="D4B896"/>
                 </a:solidFill>
@@ -22513,7 +22807,7 @@
               </a:lnSpc>
             </a:pPr>
             <a:r>
-              <a:rPr sz="900" b="1">
+              <a:rPr sz="800" b="1">
                 <a:solidFill>
                   <a:srgbClr val="B8956A"/>
                 </a:solidFill>
@@ -22596,11 +22890,17 @@
           <a:p>
             <a:pPr algn="l">
               <a:lnSpc>
-                <a:spcPct val="130000"/>
-              </a:lnSpc>
-            </a:pPr>
-            <a:r>
-              <a:rPr sz="900" b="0">
+                <a:spcPct val="100000"/>
+              </a:lnSpc>
+              <a:spcBef>
+                <a:spcPts val="0"/>
+              </a:spcBef>
+              <a:spcAft>
+                <a:spcPts val="0"/>
+              </a:spcAft>
+            </a:pPr>
+            <a:r>
+              <a:rPr sz="800" b="0">
                 <a:solidFill>
                   <a:srgbClr val="F5F1E8"/>
                 </a:solidFill>
@@ -22684,11 +22984,17 @@
           <a:p>
             <a:pPr algn="l">
               <a:lnSpc>
-                <a:spcPct val="130000"/>
-              </a:lnSpc>
-            </a:pPr>
-            <a:r>
-              <a:rPr sz="900" b="0">
+                <a:spcPct val="100000"/>
+              </a:lnSpc>
+              <a:spcBef>
+                <a:spcPts val="0"/>
+              </a:spcBef>
+              <a:spcAft>
+                <a:spcPts val="0"/>
+              </a:spcAft>
+            </a:pPr>
+            <a:r>
+              <a:rPr sz="800" b="0">
                 <a:solidFill>
                   <a:srgbClr val="F5F1E8"/>
                 </a:solidFill>
@@ -22773,11 +23079,17 @@
           <a:p>
             <a:pPr algn="l">
               <a:lnSpc>
-                <a:spcPct val="130000"/>
-              </a:lnSpc>
-            </a:pPr>
-            <a:r>
-              <a:rPr sz="900" b="0">
+                <a:spcPct val="100000"/>
+              </a:lnSpc>
+              <a:spcBef>
+                <a:spcPts val="0"/>
+              </a:spcBef>
+              <a:spcAft>
+                <a:spcPts val="0"/>
+              </a:spcAft>
+            </a:pPr>
+            <a:r>
+              <a:rPr sz="800" b="0">
                 <a:solidFill>
                   <a:srgbClr val="F5F1E8"/>
                 </a:solidFill>
@@ -22862,11 +23174,17 @@
           <a:p>
             <a:pPr algn="l">
               <a:lnSpc>
-                <a:spcPct val="130000"/>
-              </a:lnSpc>
-            </a:pPr>
-            <a:r>
-              <a:rPr sz="900" b="1">
+                <a:spcPct val="100000"/>
+              </a:lnSpc>
+              <a:spcBef>
+                <a:spcPts val="0"/>
+              </a:spcBef>
+              <a:spcAft>
+                <a:spcPts val="0"/>
+              </a:spcAft>
+            </a:pPr>
+            <a:r>
+              <a:rPr sz="800" b="1">
                 <a:solidFill>
                   <a:srgbClr val="D4B896"/>
                 </a:solidFill>
@@ -22954,7 +23272,7 @@
               </a:lnSpc>
             </a:pPr>
             <a:r>
-              <a:rPr sz="900" b="1">
+              <a:rPr sz="800" b="1">
                 <a:solidFill>
                   <a:srgbClr val="B8956A"/>
                 </a:solidFill>
@@ -23037,11 +23355,17 @@
           <a:p>
             <a:pPr algn="l">
               <a:lnSpc>
-                <a:spcPct val="130000"/>
-              </a:lnSpc>
-            </a:pPr>
-            <a:r>
-              <a:rPr sz="900" b="0">
+                <a:spcPct val="100000"/>
+              </a:lnSpc>
+              <a:spcBef>
+                <a:spcPts val="0"/>
+              </a:spcBef>
+              <a:spcAft>
+                <a:spcPts val="0"/>
+              </a:spcAft>
+            </a:pPr>
+            <a:r>
+              <a:rPr sz="800" b="0">
                 <a:solidFill>
                   <a:srgbClr val="F5F1E8"/>
                 </a:solidFill>
@@ -23125,11 +23449,17 @@
           <a:p>
             <a:pPr algn="l">
               <a:lnSpc>
-                <a:spcPct val="130000"/>
-              </a:lnSpc>
-            </a:pPr>
-            <a:r>
-              <a:rPr sz="900" b="0">
+                <a:spcPct val="100000"/>
+              </a:lnSpc>
+              <a:spcBef>
+                <a:spcPts val="0"/>
+              </a:spcBef>
+              <a:spcAft>
+                <a:spcPts val="0"/>
+              </a:spcAft>
+            </a:pPr>
+            <a:r>
+              <a:rPr sz="800" b="0">
                 <a:solidFill>
                   <a:srgbClr val="F5F1E8"/>
                 </a:solidFill>
@@ -23214,11 +23544,17 @@
           <a:p>
             <a:pPr algn="l">
               <a:lnSpc>
-                <a:spcPct val="130000"/>
-              </a:lnSpc>
-            </a:pPr>
-            <a:r>
-              <a:rPr sz="900" b="0">
+                <a:spcPct val="100000"/>
+              </a:lnSpc>
+              <a:spcBef>
+                <a:spcPts val="0"/>
+              </a:spcBef>
+              <a:spcAft>
+                <a:spcPts val="0"/>
+              </a:spcAft>
+            </a:pPr>
+            <a:r>
+              <a:rPr sz="800" b="0">
                 <a:solidFill>
                   <a:srgbClr val="F5F1E8"/>
                 </a:solidFill>
@@ -23303,11 +23639,17 @@
           <a:p>
             <a:pPr algn="l">
               <a:lnSpc>
-                <a:spcPct val="130000"/>
-              </a:lnSpc>
-            </a:pPr>
-            <a:r>
-              <a:rPr sz="900" b="1">
+                <a:spcPct val="100000"/>
+              </a:lnSpc>
+              <a:spcBef>
+                <a:spcPts val="0"/>
+              </a:spcBef>
+              <a:spcAft>
+                <a:spcPts val="0"/>
+              </a:spcAft>
+            </a:pPr>
+            <a:r>
+              <a:rPr sz="800" b="1">
                 <a:solidFill>
                   <a:srgbClr val="D4B896"/>
                 </a:solidFill>
@@ -23396,7 +23738,7 @@
               </a:lnSpc>
             </a:pPr>
             <a:r>
-              <a:rPr sz="900" b="1">
+              <a:rPr sz="800" b="1">
                 <a:solidFill>
                   <a:srgbClr val="B8956A"/>
                 </a:solidFill>
@@ -23479,11 +23821,17 @@
           <a:p>
             <a:pPr algn="l">
               <a:lnSpc>
-                <a:spcPct val="130000"/>
-              </a:lnSpc>
-            </a:pPr>
-            <a:r>
-              <a:rPr sz="900" b="0">
+                <a:spcPct val="100000"/>
+              </a:lnSpc>
+              <a:spcBef>
+                <a:spcPts val="0"/>
+              </a:spcBef>
+              <a:spcAft>
+                <a:spcPts val="0"/>
+              </a:spcAft>
+            </a:pPr>
+            <a:r>
+              <a:rPr sz="800" b="0">
                 <a:solidFill>
                   <a:srgbClr val="F5F1E8"/>
                 </a:solidFill>
@@ -23567,11 +23915,17 @@
           <a:p>
             <a:pPr algn="l">
               <a:lnSpc>
-                <a:spcPct val="130000"/>
-              </a:lnSpc>
-            </a:pPr>
-            <a:r>
-              <a:rPr sz="900" b="0">
+                <a:spcPct val="100000"/>
+              </a:lnSpc>
+              <a:spcBef>
+                <a:spcPts val="0"/>
+              </a:spcBef>
+              <a:spcAft>
+                <a:spcPts val="0"/>
+              </a:spcAft>
+            </a:pPr>
+            <a:r>
+              <a:rPr sz="800" b="0">
                 <a:solidFill>
                   <a:srgbClr val="F5F1E8"/>
                 </a:solidFill>
@@ -23655,11 +24009,17 @@
           <a:p>
             <a:pPr algn="l">
               <a:lnSpc>
-                <a:spcPct val="130000"/>
-              </a:lnSpc>
-            </a:pPr>
-            <a:r>
-              <a:rPr sz="900" b="0">
+                <a:spcPct val="100000"/>
+              </a:lnSpc>
+              <a:spcBef>
+                <a:spcPts val="0"/>
+              </a:spcBef>
+              <a:spcAft>
+                <a:spcPts val="0"/>
+              </a:spcAft>
+            </a:pPr>
+            <a:r>
+              <a:rPr sz="800" b="0">
                 <a:solidFill>
                   <a:srgbClr val="F5F1E8"/>
                 </a:solidFill>
@@ -23744,11 +24104,17 @@
           <a:p>
             <a:pPr algn="l">
               <a:lnSpc>
-                <a:spcPct val="130000"/>
-              </a:lnSpc>
-            </a:pPr>
-            <a:r>
-              <a:rPr sz="900" b="1">
+                <a:spcPct val="100000"/>
+              </a:lnSpc>
+              <a:spcBef>
+                <a:spcPts val="0"/>
+              </a:spcBef>
+              <a:spcAft>
+                <a:spcPts val="0"/>
+              </a:spcAft>
+            </a:pPr>
+            <a:r>
+              <a:rPr sz="800" b="1">
                 <a:solidFill>
                   <a:srgbClr val="D4B896"/>
                 </a:solidFill>
@@ -23837,7 +24203,7 @@
               </a:lnSpc>
             </a:pPr>
             <a:r>
-              <a:rPr sz="900" b="1">
+              <a:rPr sz="800" b="1">
                 <a:solidFill>
                   <a:srgbClr val="B8956A"/>
                 </a:solidFill>
@@ -23920,11 +24286,17 @@
           <a:p>
             <a:pPr algn="l">
               <a:lnSpc>
-                <a:spcPct val="130000"/>
-              </a:lnSpc>
-            </a:pPr>
-            <a:r>
-              <a:rPr sz="900" b="0">
+                <a:spcPct val="100000"/>
+              </a:lnSpc>
+              <a:spcBef>
+                <a:spcPts val="0"/>
+              </a:spcBef>
+              <a:spcAft>
+                <a:spcPts val="0"/>
+              </a:spcAft>
+            </a:pPr>
+            <a:r>
+              <a:rPr sz="800" b="0">
                 <a:solidFill>
                   <a:srgbClr val="F5F1E8"/>
                 </a:solidFill>
@@ -24008,11 +24380,17 @@
           <a:p>
             <a:pPr algn="l">
               <a:lnSpc>
-                <a:spcPct val="130000"/>
-              </a:lnSpc>
-            </a:pPr>
-            <a:r>
-              <a:rPr sz="900" b="0">
+                <a:spcPct val="100000"/>
+              </a:lnSpc>
+              <a:spcBef>
+                <a:spcPts val="0"/>
+              </a:spcBef>
+              <a:spcAft>
+                <a:spcPts val="0"/>
+              </a:spcAft>
+            </a:pPr>
+            <a:r>
+              <a:rPr sz="800" b="0">
                 <a:solidFill>
                   <a:srgbClr val="F5F1E8"/>
                 </a:solidFill>
@@ -24097,11 +24475,17 @@
           <a:p>
             <a:pPr algn="l">
               <a:lnSpc>
-                <a:spcPct val="130000"/>
-              </a:lnSpc>
-            </a:pPr>
-            <a:r>
-              <a:rPr sz="900" b="0">
+                <a:spcPct val="100000"/>
+              </a:lnSpc>
+              <a:spcBef>
+                <a:spcPts val="0"/>
+              </a:spcBef>
+              <a:spcAft>
+                <a:spcPts val="0"/>
+              </a:spcAft>
+            </a:pPr>
+            <a:r>
+              <a:rPr sz="800" b="0">
                 <a:solidFill>
                   <a:srgbClr val="F5F1E8"/>
                 </a:solidFill>
@@ -24186,11 +24570,17 @@
           <a:p>
             <a:pPr algn="l">
               <a:lnSpc>
-                <a:spcPct val="130000"/>
-              </a:lnSpc>
-            </a:pPr>
-            <a:r>
-              <a:rPr sz="900" b="1">
+                <a:spcPct val="100000"/>
+              </a:lnSpc>
+              <a:spcBef>
+                <a:spcPts val="0"/>
+              </a:spcBef>
+              <a:spcAft>
+                <a:spcPts val="0"/>
+              </a:spcAft>
+            </a:pPr>
+            <a:r>
+              <a:rPr sz="800" b="1">
                 <a:solidFill>
                   <a:srgbClr val="D4B896"/>
                 </a:solidFill>
@@ -24279,7 +24669,7 @@
               </a:lnSpc>
             </a:pPr>
             <a:r>
-              <a:rPr sz="900" b="1">
+              <a:rPr sz="800" b="1">
                 <a:solidFill>
                   <a:srgbClr val="B8956A"/>
                 </a:solidFill>
@@ -24366,7 +24756,7 @@
               </a:lnSpc>
             </a:pPr>
             <a:r>
-              <a:rPr sz="900" b="0">
+              <a:rPr sz="800" b="0">
                 <a:solidFill>
                   <a:srgbClr val="F5F1E8"/>
                 </a:solidFill>
@@ -24449,11 +24839,17 @@
           <a:p>
             <a:pPr algn="l">
               <a:lnSpc>
-                <a:spcPct val="130000"/>
-              </a:lnSpc>
-            </a:pPr>
-            <a:r>
-              <a:rPr sz="900" b="0">
+                <a:spcPct val="100000"/>
+              </a:lnSpc>
+              <a:spcBef>
+                <a:spcPts val="0"/>
+              </a:spcBef>
+              <a:spcAft>
+                <a:spcPts val="0"/>
+              </a:spcAft>
+            </a:pPr>
+            <a:r>
+              <a:rPr sz="800" b="0">
                 <a:solidFill>
                   <a:srgbClr val="F5F1E8"/>
                 </a:solidFill>
@@ -24537,11 +24933,17 @@
           <a:p>
             <a:pPr algn="l">
               <a:lnSpc>
-                <a:spcPct val="130000"/>
-              </a:lnSpc>
-            </a:pPr>
-            <a:r>
-              <a:rPr sz="900" b="0">
+                <a:spcPct val="100000"/>
+              </a:lnSpc>
+              <a:spcBef>
+                <a:spcPts val="0"/>
+              </a:spcBef>
+              <a:spcAft>
+                <a:spcPts val="0"/>
+              </a:spcAft>
+            </a:pPr>
+            <a:r>
+              <a:rPr sz="800" b="0">
                 <a:solidFill>
                   <a:srgbClr val="F5F1E8"/>
                 </a:solidFill>
@@ -24626,11 +25028,17 @@
           <a:p>
             <a:pPr algn="l">
               <a:lnSpc>
-                <a:spcPct val="130000"/>
-              </a:lnSpc>
-            </a:pPr>
-            <a:r>
-              <a:rPr sz="900" b="1">
+                <a:spcPct val="100000"/>
+              </a:lnSpc>
+              <a:spcBef>
+                <a:spcPts val="0"/>
+              </a:spcBef>
+              <a:spcAft>
+                <a:spcPts val="0"/>
+              </a:spcAft>
+            </a:pPr>
+            <a:r>
+              <a:rPr sz="800" b="1">
                 <a:solidFill>
                   <a:srgbClr val="D4B896"/>
                 </a:solidFill>
@@ -24718,7 +25126,7 @@
               </a:lnSpc>
             </a:pPr>
             <a:r>
-              <a:rPr sz="900" b="1">
+              <a:rPr sz="800" b="1">
                 <a:solidFill>
                   <a:srgbClr val="B8956A"/>
                 </a:solidFill>
@@ -24801,11 +25209,17 @@
           <a:p>
             <a:pPr algn="l">
               <a:lnSpc>
-                <a:spcPct val="130000"/>
-              </a:lnSpc>
-            </a:pPr>
-            <a:r>
-              <a:rPr sz="900" b="0">
+                <a:spcPct val="100000"/>
+              </a:lnSpc>
+              <a:spcBef>
+                <a:spcPts val="0"/>
+              </a:spcBef>
+              <a:spcAft>
+                <a:spcPts val="0"/>
+              </a:spcAft>
+            </a:pPr>
+            <a:r>
+              <a:rPr sz="800" b="0">
                 <a:solidFill>
                   <a:srgbClr val="F5F1E8"/>
                 </a:solidFill>
@@ -24889,11 +25303,17 @@
           <a:p>
             <a:pPr algn="l">
               <a:lnSpc>
-                <a:spcPct val="130000"/>
-              </a:lnSpc>
-            </a:pPr>
-            <a:r>
-              <a:rPr sz="900" b="0">
+                <a:spcPct val="100000"/>
+              </a:lnSpc>
+              <a:spcBef>
+                <a:spcPts val="0"/>
+              </a:spcBef>
+              <a:spcAft>
+                <a:spcPts val="0"/>
+              </a:spcAft>
+            </a:pPr>
+            <a:r>
+              <a:rPr sz="800" b="0">
                 <a:solidFill>
                   <a:srgbClr val="F5F1E8"/>
                 </a:solidFill>
@@ -24978,11 +25398,17 @@
           <a:p>
             <a:pPr algn="l">
               <a:lnSpc>
-                <a:spcPct val="130000"/>
-              </a:lnSpc>
-            </a:pPr>
-            <a:r>
-              <a:rPr sz="900" b="0">
+                <a:spcPct val="100000"/>
+              </a:lnSpc>
+              <a:spcBef>
+                <a:spcPts val="0"/>
+              </a:spcBef>
+              <a:spcAft>
+                <a:spcPts val="0"/>
+              </a:spcAft>
+            </a:pPr>
+            <a:r>
+              <a:rPr sz="800" b="0">
                 <a:solidFill>
                   <a:srgbClr val="F5F1E8"/>
                 </a:solidFill>
@@ -25067,11 +25493,17 @@
           <a:p>
             <a:pPr algn="l">
               <a:lnSpc>
-                <a:spcPct val="130000"/>
-              </a:lnSpc>
-            </a:pPr>
-            <a:r>
-              <a:rPr sz="900" b="1">
+                <a:spcPct val="100000"/>
+              </a:lnSpc>
+              <a:spcBef>
+                <a:spcPts val="0"/>
+              </a:spcBef>
+              <a:spcAft>
+                <a:spcPts val="0"/>
+              </a:spcAft>
+            </a:pPr>
+            <a:r>
+              <a:rPr sz="800" b="1">
                 <a:solidFill>
                   <a:srgbClr val="D4B896"/>
                 </a:solidFill>
@@ -25160,7 +25592,7 @@
               </a:lnSpc>
             </a:pPr>
             <a:r>
-              <a:rPr sz="900" b="1">
+              <a:rPr sz="800" b="1">
                 <a:solidFill>
                   <a:srgbClr val="B8956A"/>
                 </a:solidFill>
@@ -25243,11 +25675,17 @@
           <a:p>
             <a:pPr algn="l">
               <a:lnSpc>
-                <a:spcPct val="130000"/>
-              </a:lnSpc>
-            </a:pPr>
-            <a:r>
-              <a:rPr sz="900" b="0">
+                <a:spcPct val="100000"/>
+              </a:lnSpc>
+              <a:spcBef>
+                <a:spcPts val="0"/>
+              </a:spcBef>
+              <a:spcAft>
+                <a:spcPts val="0"/>
+              </a:spcAft>
+            </a:pPr>
+            <a:r>
+              <a:rPr sz="800" b="0">
                 <a:solidFill>
                   <a:srgbClr val="F5F1E8"/>
                 </a:solidFill>
@@ -25331,11 +25769,17 @@
           <a:p>
             <a:pPr algn="l">
               <a:lnSpc>
-                <a:spcPct val="130000"/>
-              </a:lnSpc>
-            </a:pPr>
-            <a:r>
-              <a:rPr sz="900" b="0">
+                <a:spcPct val="100000"/>
+              </a:lnSpc>
+              <a:spcBef>
+                <a:spcPts val="0"/>
+              </a:spcBef>
+              <a:spcAft>
+                <a:spcPts val="0"/>
+              </a:spcAft>
+            </a:pPr>
+            <a:r>
+              <a:rPr sz="800" b="0">
                 <a:solidFill>
                   <a:srgbClr val="F5F1E8"/>
                 </a:solidFill>
@@ -25420,11 +25864,17 @@
           <a:p>
             <a:pPr algn="l">
               <a:lnSpc>
-                <a:spcPct val="130000"/>
-              </a:lnSpc>
-            </a:pPr>
-            <a:r>
-              <a:rPr sz="900" b="0">
+                <a:spcPct val="100000"/>
+              </a:lnSpc>
+              <a:spcBef>
+                <a:spcPts val="0"/>
+              </a:spcBef>
+              <a:spcAft>
+                <a:spcPts val="0"/>
+              </a:spcAft>
+            </a:pPr>
+            <a:r>
+              <a:rPr sz="800" b="0">
                 <a:solidFill>
                   <a:srgbClr val="F5F1E8"/>
                 </a:solidFill>
@@ -25509,11 +25959,17 @@
           <a:p>
             <a:pPr algn="l">
               <a:lnSpc>
-                <a:spcPct val="130000"/>
-              </a:lnSpc>
-            </a:pPr>
-            <a:r>
-              <a:rPr sz="900" b="1">
+                <a:spcPct val="100000"/>
+              </a:lnSpc>
+              <a:spcBef>
+                <a:spcPts val="0"/>
+              </a:spcBef>
+              <a:spcAft>
+                <a:spcPts val="0"/>
+              </a:spcAft>
+            </a:pPr>
+            <a:r>
+              <a:rPr sz="800" b="1">
                 <a:solidFill>
                   <a:srgbClr val="D4B896"/>
                 </a:solidFill>
@@ -25667,7 +26123,7 @@
               </a:lnSpc>
             </a:pPr>
             <a:r>
-              <a:rPr sz="900" b="0">
+              <a:rPr sz="800" b="0">
                 <a:solidFill>
                   <a:srgbClr val="6E685C"/>
                 </a:solidFill>
@@ -26393,26 +26849,32 @@
         <p:spPr>
           <a:xfrm>
             <a:off x="777240" y="5486400"/>
-            <a:ext cx="3172968" cy="228600"/>
-          </a:xfrm>
-          <a:prstGeom prst="rect">
-            <a:avLst/>
-          </a:prstGeom>
-          <a:noFill/>
-        </p:spPr>
-        <p:txBody>
-          <a:bodyPr wrap="square" lIns="0" rIns="0" tIns="0" bIns="0" anchor="t">
-            <a:spAutoFit/>
-          </a:bodyPr>
-          <a:lstStyle/>
-          <a:p>
-            <a:pPr algn="l">
-              <a:lnSpc>
-                <a:spcPct val="120000"/>
-              </a:lnSpc>
-            </a:pPr>
-            <a:r>
-              <a:rPr sz="950" b="1">
+            <a:ext cx="3172968" cy="411480"/>
+          </a:xfrm>
+          <a:prstGeom prst="rect">
+            <a:avLst/>
+          </a:prstGeom>
+          <a:noFill/>
+        </p:spPr>
+        <p:txBody>
+          <a:bodyPr wrap="square" lIns="0" rIns="0" tIns="0" bIns="0" anchor="t">
+            <a:spAutoFit/>
+          </a:bodyPr>
+          <a:lstStyle/>
+          <a:p>
+            <a:pPr algn="l">
+              <a:lnSpc>
+                <a:spcPct val="100000"/>
+              </a:lnSpc>
+              <a:spcBef>
+                <a:spcPts val="0"/>
+              </a:spcBef>
+              <a:spcAft>
+                <a:spcPts val="0"/>
+              </a:spcAft>
+            </a:pPr>
+            <a:r>
+              <a:rPr sz="900" b="1">
                 <a:solidFill>
                   <a:srgbClr val="D4B896"/>
                 </a:solidFill>
@@ -26847,26 +27309,32 @@
         <p:spPr>
           <a:xfrm>
             <a:off x="4498848" y="5486400"/>
-            <a:ext cx="3172968" cy="228600"/>
-          </a:xfrm>
-          <a:prstGeom prst="rect">
-            <a:avLst/>
-          </a:prstGeom>
-          <a:noFill/>
-        </p:spPr>
-        <p:txBody>
-          <a:bodyPr wrap="square" lIns="0" rIns="0" tIns="0" bIns="0" anchor="t">
-            <a:spAutoFit/>
-          </a:bodyPr>
-          <a:lstStyle/>
-          <a:p>
-            <a:pPr algn="l">
-              <a:lnSpc>
-                <a:spcPct val="120000"/>
-              </a:lnSpc>
-            </a:pPr>
-            <a:r>
-              <a:rPr sz="950" b="1">
+            <a:ext cx="3172968" cy="411480"/>
+          </a:xfrm>
+          <a:prstGeom prst="rect">
+            <a:avLst/>
+          </a:prstGeom>
+          <a:noFill/>
+        </p:spPr>
+        <p:txBody>
+          <a:bodyPr wrap="square" lIns="0" rIns="0" tIns="0" bIns="0" anchor="t">
+            <a:spAutoFit/>
+          </a:bodyPr>
+          <a:lstStyle/>
+          <a:p>
+            <a:pPr algn="l">
+              <a:lnSpc>
+                <a:spcPct val="100000"/>
+              </a:lnSpc>
+              <a:spcBef>
+                <a:spcPts val="0"/>
+              </a:spcBef>
+              <a:spcAft>
+                <a:spcPts val="0"/>
+              </a:spcAft>
+            </a:pPr>
+            <a:r>
+              <a:rPr sz="900" b="1">
                 <a:solidFill>
                   <a:srgbClr val="D4B896"/>
                 </a:solidFill>
@@ -27301,26 +27769,32 @@
         <p:spPr>
           <a:xfrm>
             <a:off x="8220456" y="5486400"/>
-            <a:ext cx="3172968" cy="228600"/>
-          </a:xfrm>
-          <a:prstGeom prst="rect">
-            <a:avLst/>
-          </a:prstGeom>
-          <a:noFill/>
-        </p:spPr>
-        <p:txBody>
-          <a:bodyPr wrap="square" lIns="0" rIns="0" tIns="0" bIns="0" anchor="t">
-            <a:spAutoFit/>
-          </a:bodyPr>
-          <a:lstStyle/>
-          <a:p>
-            <a:pPr algn="l">
-              <a:lnSpc>
-                <a:spcPct val="120000"/>
-              </a:lnSpc>
-            </a:pPr>
-            <a:r>
-              <a:rPr sz="950" b="1">
+            <a:ext cx="3172968" cy="411480"/>
+          </a:xfrm>
+          <a:prstGeom prst="rect">
+            <a:avLst/>
+          </a:prstGeom>
+          <a:noFill/>
+        </p:spPr>
+        <p:txBody>
+          <a:bodyPr wrap="square" lIns="0" rIns="0" tIns="0" bIns="0" anchor="t">
+            <a:spAutoFit/>
+          </a:bodyPr>
+          <a:lstStyle/>
+          <a:p>
+            <a:pPr algn="l">
+              <a:lnSpc>
+                <a:spcPct val="100000"/>
+              </a:lnSpc>
+              <a:spcBef>
+                <a:spcPts val="0"/>
+              </a:spcBef>
+              <a:spcAft>
+                <a:spcPts val="0"/>
+              </a:spcAft>
+            </a:pPr>
+            <a:r>
+              <a:rPr sz="900" b="1">
                 <a:solidFill>
                   <a:srgbClr val="D4B896"/>
                 </a:solidFill>
@@ -27951,7 +28425,7 @@
         <p:spPr>
           <a:xfrm>
             <a:off x="777240" y="3547871"/>
-            <a:ext cx="3172968" cy="228600"/>
+            <a:ext cx="3172968" cy="274320"/>
           </a:xfrm>
           <a:prstGeom prst="rect">
             <a:avLst/>
@@ -28158,7 +28632,7 @@
         <p:spPr>
           <a:xfrm>
             <a:off x="4498848" y="3547871"/>
-            <a:ext cx="3172968" cy="228600"/>
+            <a:ext cx="3172968" cy="274320"/>
           </a:xfrm>
           <a:prstGeom prst="rect">
             <a:avLst/>
@@ -28365,7 +28839,7 @@
         <p:spPr>
           <a:xfrm>
             <a:off x="8220456" y="3547871"/>
-            <a:ext cx="3172968" cy="228600"/>
+            <a:ext cx="3172968" cy="274320"/>
           </a:xfrm>
           <a:prstGeom prst="rect">
             <a:avLst/>
@@ -28572,7 +29046,7 @@
         <p:spPr>
           <a:xfrm>
             <a:off x="777240" y="5586983"/>
-            <a:ext cx="3172968" cy="228600"/>
+            <a:ext cx="3172968" cy="274320"/>
           </a:xfrm>
           <a:prstGeom prst="rect">
             <a:avLst/>
@@ -28779,7 +29253,7 @@
         <p:spPr>
           <a:xfrm>
             <a:off x="4498848" y="5586983"/>
-            <a:ext cx="3172968" cy="228600"/>
+            <a:ext cx="3172968" cy="274320"/>
           </a:xfrm>
           <a:prstGeom prst="rect">
             <a:avLst/>
@@ -28986,7 +29460,7 @@
         <p:spPr>
           <a:xfrm>
             <a:off x="8220456" y="5586983"/>
-            <a:ext cx="3172968" cy="228600"/>
+            <a:ext cx="3172968" cy="274320"/>
           </a:xfrm>
           <a:prstGeom prst="rect">
             <a:avLst/>
@@ -31677,7 +32151,7 @@
               </a:lnSpc>
             </a:pPr>
             <a:r>
-              <a:rPr sz="850" b="0">
+              <a:rPr sz="800" b="0">
                 <a:solidFill>
                   <a:srgbClr val="B8956A"/>
                 </a:solidFill>
@@ -31747,11 +32221,17 @@
           <a:p>
             <a:pPr algn="l">
               <a:lnSpc>
-                <a:spcPct val="135000"/>
-              </a:lnSpc>
-            </a:pPr>
-            <a:r>
-              <a:rPr sz="850" b="0">
+                <a:spcPct val="100000"/>
+              </a:lnSpc>
+              <a:spcBef>
+                <a:spcPts val="0"/>
+              </a:spcBef>
+              <a:spcAft>
+                <a:spcPts val="0"/>
+              </a:spcAft>
+            </a:pPr>
+            <a:r>
+              <a:rPr sz="800" b="0">
                 <a:solidFill>
                   <a:srgbClr val="F5F1E8"/>
                 </a:solidFill>
@@ -31763,11 +32243,17 @@
           <a:p>
             <a:pPr algn="l">
               <a:lnSpc>
-                <a:spcPct val="135000"/>
-              </a:lnSpc>
-            </a:pPr>
-            <a:r>
-              <a:rPr sz="850" b="0">
+                <a:spcPct val="100000"/>
+              </a:lnSpc>
+              <a:spcBef>
+                <a:spcPts val="0"/>
+              </a:spcBef>
+              <a:spcAft>
+                <a:spcPts val="0"/>
+              </a:spcAft>
+            </a:pPr>
+            <a:r>
+              <a:rPr sz="800" b="0">
                 <a:solidFill>
                   <a:srgbClr val="F5F1E8"/>
                 </a:solidFill>
@@ -31779,11 +32265,17 @@
           <a:p>
             <a:pPr algn="l">
               <a:lnSpc>
-                <a:spcPct val="135000"/>
-              </a:lnSpc>
-            </a:pPr>
-            <a:r>
-              <a:rPr sz="850" b="0">
+                <a:spcPct val="100000"/>
+              </a:lnSpc>
+              <a:spcBef>
+                <a:spcPts val="0"/>
+              </a:spcBef>
+              <a:spcAft>
+                <a:spcPts val="0"/>
+              </a:spcAft>
+            </a:pPr>
+            <a:r>
+              <a:rPr sz="800" b="0">
                 <a:solidFill>
                   <a:srgbClr val="F5F1E8"/>
                 </a:solidFill>
@@ -31795,11 +32287,17 @@
           <a:p>
             <a:pPr algn="l">
               <a:lnSpc>
-                <a:spcPct val="135000"/>
-              </a:lnSpc>
-            </a:pPr>
-            <a:r>
-              <a:rPr sz="850" b="0">
+                <a:spcPct val="100000"/>
+              </a:lnSpc>
+              <a:spcBef>
+                <a:spcPts val="0"/>
+              </a:spcBef>
+              <a:spcAft>
+                <a:spcPts val="0"/>
+              </a:spcAft>
+            </a:pPr>
+            <a:r>
+              <a:rPr sz="800" b="0">
                 <a:solidFill>
                   <a:srgbClr val="F5F1E8"/>
                 </a:solidFill>
@@ -31931,7 +32429,7 @@
               </a:lnSpc>
             </a:pPr>
             <a:r>
-              <a:rPr sz="850" b="0">
+              <a:rPr sz="800" b="0">
                 <a:solidFill>
                   <a:srgbClr val="B8956A"/>
                 </a:solidFill>
@@ -32001,11 +32499,17 @@
           <a:p>
             <a:pPr algn="l">
               <a:lnSpc>
-                <a:spcPct val="135000"/>
-              </a:lnSpc>
-            </a:pPr>
-            <a:r>
-              <a:rPr sz="850" b="0">
+                <a:spcPct val="100000"/>
+              </a:lnSpc>
+              <a:spcBef>
+                <a:spcPts val="0"/>
+              </a:spcBef>
+              <a:spcAft>
+                <a:spcPts val="0"/>
+              </a:spcAft>
+            </a:pPr>
+            <a:r>
+              <a:rPr sz="800" b="0">
                 <a:solidFill>
                   <a:srgbClr val="F5F1E8"/>
                 </a:solidFill>
@@ -32017,11 +32521,17 @@
           <a:p>
             <a:pPr algn="l">
               <a:lnSpc>
-                <a:spcPct val="135000"/>
-              </a:lnSpc>
-            </a:pPr>
-            <a:r>
-              <a:rPr sz="850" b="0">
+                <a:spcPct val="100000"/>
+              </a:lnSpc>
+              <a:spcBef>
+                <a:spcPts val="0"/>
+              </a:spcBef>
+              <a:spcAft>
+                <a:spcPts val="0"/>
+              </a:spcAft>
+            </a:pPr>
+            <a:r>
+              <a:rPr sz="800" b="0">
                 <a:solidFill>
                   <a:srgbClr val="F5F1E8"/>
                 </a:solidFill>
@@ -32033,11 +32543,17 @@
           <a:p>
             <a:pPr algn="l">
               <a:lnSpc>
-                <a:spcPct val="135000"/>
-              </a:lnSpc>
-            </a:pPr>
-            <a:r>
-              <a:rPr sz="850" b="0">
+                <a:spcPct val="100000"/>
+              </a:lnSpc>
+              <a:spcBef>
+                <a:spcPts val="0"/>
+              </a:spcBef>
+              <a:spcAft>
+                <a:spcPts val="0"/>
+              </a:spcAft>
+            </a:pPr>
+            <a:r>
+              <a:rPr sz="800" b="0">
                 <a:solidFill>
                   <a:srgbClr val="F5F1E8"/>
                 </a:solidFill>
@@ -32049,11 +32565,17 @@
           <a:p>
             <a:pPr algn="l">
               <a:lnSpc>
-                <a:spcPct val="135000"/>
-              </a:lnSpc>
-            </a:pPr>
-            <a:r>
-              <a:rPr sz="850" b="0">
+                <a:spcPct val="100000"/>
+              </a:lnSpc>
+              <a:spcBef>
+                <a:spcPts val="0"/>
+              </a:spcBef>
+              <a:spcAft>
+                <a:spcPts val="0"/>
+              </a:spcAft>
+            </a:pPr>
+            <a:r>
+              <a:rPr sz="800" b="0">
                 <a:solidFill>
                   <a:srgbClr val="F5F1E8"/>
                 </a:solidFill>
@@ -32185,7 +32707,7 @@
               </a:lnSpc>
             </a:pPr>
             <a:r>
-              <a:rPr sz="850" b="0">
+              <a:rPr sz="800" b="0">
                 <a:solidFill>
                   <a:srgbClr val="B8956A"/>
                 </a:solidFill>
@@ -32255,11 +32777,17 @@
           <a:p>
             <a:pPr algn="l">
               <a:lnSpc>
-                <a:spcPct val="135000"/>
-              </a:lnSpc>
-            </a:pPr>
-            <a:r>
-              <a:rPr sz="850" b="0">
+                <a:spcPct val="100000"/>
+              </a:lnSpc>
+              <a:spcBef>
+                <a:spcPts val="0"/>
+              </a:spcBef>
+              <a:spcAft>
+                <a:spcPts val="0"/>
+              </a:spcAft>
+            </a:pPr>
+            <a:r>
+              <a:rPr sz="800" b="0">
                 <a:solidFill>
                   <a:srgbClr val="F5F1E8"/>
                 </a:solidFill>
@@ -32271,11 +32799,17 @@
           <a:p>
             <a:pPr algn="l">
               <a:lnSpc>
-                <a:spcPct val="135000"/>
-              </a:lnSpc>
-            </a:pPr>
-            <a:r>
-              <a:rPr sz="850" b="0">
+                <a:spcPct val="100000"/>
+              </a:lnSpc>
+              <a:spcBef>
+                <a:spcPts val="0"/>
+              </a:spcBef>
+              <a:spcAft>
+                <a:spcPts val="0"/>
+              </a:spcAft>
+            </a:pPr>
+            <a:r>
+              <a:rPr sz="800" b="0">
                 <a:solidFill>
                   <a:srgbClr val="F5F1E8"/>
                 </a:solidFill>
@@ -32287,11 +32821,17 @@
           <a:p>
             <a:pPr algn="l">
               <a:lnSpc>
-                <a:spcPct val="135000"/>
-              </a:lnSpc>
-            </a:pPr>
-            <a:r>
-              <a:rPr sz="850" b="0">
+                <a:spcPct val="100000"/>
+              </a:lnSpc>
+              <a:spcBef>
+                <a:spcPts val="0"/>
+              </a:spcBef>
+              <a:spcAft>
+                <a:spcPts val="0"/>
+              </a:spcAft>
+            </a:pPr>
+            <a:r>
+              <a:rPr sz="800" b="0">
                 <a:solidFill>
                   <a:srgbClr val="F5F1E8"/>
                 </a:solidFill>
@@ -32303,11 +32843,17 @@
           <a:p>
             <a:pPr algn="l">
               <a:lnSpc>
-                <a:spcPct val="135000"/>
-              </a:lnSpc>
-            </a:pPr>
-            <a:r>
-              <a:rPr sz="850" b="0">
+                <a:spcPct val="100000"/>
+              </a:lnSpc>
+              <a:spcBef>
+                <a:spcPts val="0"/>
+              </a:spcBef>
+              <a:spcAft>
+                <a:spcPts val="0"/>
+              </a:spcAft>
+            </a:pPr>
+            <a:r>
+              <a:rPr sz="800" b="0">
                 <a:solidFill>
                   <a:srgbClr val="F5F1E8"/>
                 </a:solidFill>
@@ -32439,7 +32985,7 @@
               </a:lnSpc>
             </a:pPr>
             <a:r>
-              <a:rPr sz="850" b="0">
+              <a:rPr sz="800" b="0">
                 <a:solidFill>
                   <a:srgbClr val="B8956A"/>
                 </a:solidFill>
@@ -32509,11 +33055,17 @@
           <a:p>
             <a:pPr algn="l">
               <a:lnSpc>
-                <a:spcPct val="135000"/>
-              </a:lnSpc>
-            </a:pPr>
-            <a:r>
-              <a:rPr sz="850" b="0">
+                <a:spcPct val="100000"/>
+              </a:lnSpc>
+              <a:spcBef>
+                <a:spcPts val="0"/>
+              </a:spcBef>
+              <a:spcAft>
+                <a:spcPts val="0"/>
+              </a:spcAft>
+            </a:pPr>
+            <a:r>
+              <a:rPr sz="800" b="0">
                 <a:solidFill>
                   <a:srgbClr val="F5F1E8"/>
                 </a:solidFill>
@@ -32525,11 +33077,17 @@
           <a:p>
             <a:pPr algn="l">
               <a:lnSpc>
-                <a:spcPct val="135000"/>
-              </a:lnSpc>
-            </a:pPr>
-            <a:r>
-              <a:rPr sz="850" b="0">
+                <a:spcPct val="100000"/>
+              </a:lnSpc>
+              <a:spcBef>
+                <a:spcPts val="0"/>
+              </a:spcBef>
+              <a:spcAft>
+                <a:spcPts val="0"/>
+              </a:spcAft>
+            </a:pPr>
+            <a:r>
+              <a:rPr sz="800" b="0">
                 <a:solidFill>
                   <a:srgbClr val="F5F1E8"/>
                 </a:solidFill>
@@ -32541,11 +33099,17 @@
           <a:p>
             <a:pPr algn="l">
               <a:lnSpc>
-                <a:spcPct val="135000"/>
-              </a:lnSpc>
-            </a:pPr>
-            <a:r>
-              <a:rPr sz="850" b="0">
+                <a:spcPct val="100000"/>
+              </a:lnSpc>
+              <a:spcBef>
+                <a:spcPts val="0"/>
+              </a:spcBef>
+              <a:spcAft>
+                <a:spcPts val="0"/>
+              </a:spcAft>
+            </a:pPr>
+            <a:r>
+              <a:rPr sz="800" b="0">
                 <a:solidFill>
                   <a:srgbClr val="F5F1E8"/>
                 </a:solidFill>
@@ -32557,11 +33121,17 @@
           <a:p>
             <a:pPr algn="l">
               <a:lnSpc>
-                <a:spcPct val="135000"/>
-              </a:lnSpc>
-            </a:pPr>
-            <a:r>
-              <a:rPr sz="850" b="0">
+                <a:spcPct val="100000"/>
+              </a:lnSpc>
+              <a:spcBef>
+                <a:spcPts val="0"/>
+              </a:spcBef>
+              <a:spcAft>
+                <a:spcPts val="0"/>
+              </a:spcAft>
+            </a:pPr>
+            <a:r>
+              <a:rPr sz="800" b="0">
                 <a:solidFill>
                   <a:srgbClr val="F5F1E8"/>
                 </a:solidFill>
@@ -32693,7 +33263,7 @@
               </a:lnSpc>
             </a:pPr>
             <a:r>
-              <a:rPr sz="850" b="0">
+              <a:rPr sz="800" b="0">
                 <a:solidFill>
                   <a:srgbClr val="B8956A"/>
                 </a:solidFill>
@@ -32763,11 +33333,17 @@
           <a:p>
             <a:pPr algn="l">
               <a:lnSpc>
-                <a:spcPct val="135000"/>
-              </a:lnSpc>
-            </a:pPr>
-            <a:r>
-              <a:rPr sz="850" b="0">
+                <a:spcPct val="100000"/>
+              </a:lnSpc>
+              <a:spcBef>
+                <a:spcPts val="0"/>
+              </a:spcBef>
+              <a:spcAft>
+                <a:spcPts val="0"/>
+              </a:spcAft>
+            </a:pPr>
+            <a:r>
+              <a:rPr sz="800" b="0">
                 <a:solidFill>
                   <a:srgbClr val="F5F1E8"/>
                 </a:solidFill>
@@ -32779,11 +33355,17 @@
           <a:p>
             <a:pPr algn="l">
               <a:lnSpc>
-                <a:spcPct val="135000"/>
-              </a:lnSpc>
-            </a:pPr>
-            <a:r>
-              <a:rPr sz="850" b="0">
+                <a:spcPct val="100000"/>
+              </a:lnSpc>
+              <a:spcBef>
+                <a:spcPts val="0"/>
+              </a:spcBef>
+              <a:spcAft>
+                <a:spcPts val="0"/>
+              </a:spcAft>
+            </a:pPr>
+            <a:r>
+              <a:rPr sz="800" b="0">
                 <a:solidFill>
                   <a:srgbClr val="F5F1E8"/>
                 </a:solidFill>
@@ -32795,11 +33377,17 @@
           <a:p>
             <a:pPr algn="l">
               <a:lnSpc>
-                <a:spcPct val="135000"/>
-              </a:lnSpc>
-            </a:pPr>
-            <a:r>
-              <a:rPr sz="850" b="0">
+                <a:spcPct val="100000"/>
+              </a:lnSpc>
+              <a:spcBef>
+                <a:spcPts val="0"/>
+              </a:spcBef>
+              <a:spcAft>
+                <a:spcPts val="0"/>
+              </a:spcAft>
+            </a:pPr>
+            <a:r>
+              <a:rPr sz="800" b="0">
                 <a:solidFill>
                   <a:srgbClr val="F5F1E8"/>
                 </a:solidFill>
@@ -32811,11 +33399,17 @@
           <a:p>
             <a:pPr algn="l">
               <a:lnSpc>
-                <a:spcPct val="135000"/>
-              </a:lnSpc>
-            </a:pPr>
-            <a:r>
-              <a:rPr sz="850" b="0">
+                <a:spcPct val="100000"/>
+              </a:lnSpc>
+              <a:spcBef>
+                <a:spcPts val="0"/>
+              </a:spcBef>
+              <a:spcAft>
+                <a:spcPts val="0"/>
+              </a:spcAft>
+            </a:pPr>
+            <a:r>
+              <a:rPr sz="800" b="0">
                 <a:solidFill>
                   <a:srgbClr val="F5F1E8"/>
                 </a:solidFill>
@@ -32947,7 +33541,7 @@
               </a:lnSpc>
             </a:pPr>
             <a:r>
-              <a:rPr sz="850" b="0">
+              <a:rPr sz="800" b="0">
                 <a:solidFill>
                   <a:srgbClr val="B8956A"/>
                 </a:solidFill>
@@ -33017,11 +33611,17 @@
           <a:p>
             <a:pPr algn="l">
               <a:lnSpc>
-                <a:spcPct val="135000"/>
-              </a:lnSpc>
-            </a:pPr>
-            <a:r>
-              <a:rPr sz="850" b="0">
+                <a:spcPct val="100000"/>
+              </a:lnSpc>
+              <a:spcBef>
+                <a:spcPts val="0"/>
+              </a:spcBef>
+              <a:spcAft>
+                <a:spcPts val="0"/>
+              </a:spcAft>
+            </a:pPr>
+            <a:r>
+              <a:rPr sz="800" b="0">
                 <a:solidFill>
                   <a:srgbClr val="F5F1E8"/>
                 </a:solidFill>
@@ -33033,11 +33633,17 @@
           <a:p>
             <a:pPr algn="l">
               <a:lnSpc>
-                <a:spcPct val="135000"/>
-              </a:lnSpc>
-            </a:pPr>
-            <a:r>
-              <a:rPr sz="850" b="0">
+                <a:spcPct val="100000"/>
+              </a:lnSpc>
+              <a:spcBef>
+                <a:spcPts val="0"/>
+              </a:spcBef>
+              <a:spcAft>
+                <a:spcPts val="0"/>
+              </a:spcAft>
+            </a:pPr>
+            <a:r>
+              <a:rPr sz="800" b="0">
                 <a:solidFill>
                   <a:srgbClr val="F5F1E8"/>
                 </a:solidFill>
@@ -33049,11 +33655,17 @@
           <a:p>
             <a:pPr algn="l">
               <a:lnSpc>
-                <a:spcPct val="135000"/>
-              </a:lnSpc>
-            </a:pPr>
-            <a:r>
-              <a:rPr sz="850" b="0">
+                <a:spcPct val="100000"/>
+              </a:lnSpc>
+              <a:spcBef>
+                <a:spcPts val="0"/>
+              </a:spcBef>
+              <a:spcAft>
+                <a:spcPts val="0"/>
+              </a:spcAft>
+            </a:pPr>
+            <a:r>
+              <a:rPr sz="800" b="0">
                 <a:solidFill>
                   <a:srgbClr val="F5F1E8"/>
                 </a:solidFill>
@@ -33065,11 +33677,17 @@
           <a:p>
             <a:pPr algn="l">
               <a:lnSpc>
-                <a:spcPct val="135000"/>
-              </a:lnSpc>
-            </a:pPr>
-            <a:r>
-              <a:rPr sz="850" b="0">
+                <a:spcPct val="100000"/>
+              </a:lnSpc>
+              <a:spcBef>
+                <a:spcPts val="0"/>
+              </a:spcBef>
+              <a:spcAft>
+                <a:spcPts val="0"/>
+              </a:spcAft>
+            </a:pPr>
+            <a:r>
+              <a:rPr sz="800" b="0">
                 <a:solidFill>
                   <a:srgbClr val="F5F1E8"/>
                 </a:solidFill>
@@ -33201,7 +33819,7 @@
               </a:lnSpc>
             </a:pPr>
             <a:r>
-              <a:rPr sz="850" b="0">
+              <a:rPr sz="800" b="0">
                 <a:solidFill>
                   <a:srgbClr val="B8956A"/>
                 </a:solidFill>
@@ -33271,11 +33889,17 @@
           <a:p>
             <a:pPr algn="l">
               <a:lnSpc>
-                <a:spcPct val="135000"/>
-              </a:lnSpc>
-            </a:pPr>
-            <a:r>
-              <a:rPr sz="850" b="0">
+                <a:spcPct val="100000"/>
+              </a:lnSpc>
+              <a:spcBef>
+                <a:spcPts val="0"/>
+              </a:spcBef>
+              <a:spcAft>
+                <a:spcPts val="0"/>
+              </a:spcAft>
+            </a:pPr>
+            <a:r>
+              <a:rPr sz="800" b="0">
                 <a:solidFill>
                   <a:srgbClr val="F5F1E8"/>
                 </a:solidFill>
@@ -33287,11 +33911,17 @@
           <a:p>
             <a:pPr algn="l">
               <a:lnSpc>
-                <a:spcPct val="135000"/>
-              </a:lnSpc>
-            </a:pPr>
-            <a:r>
-              <a:rPr sz="850" b="0">
+                <a:spcPct val="100000"/>
+              </a:lnSpc>
+              <a:spcBef>
+                <a:spcPts val="0"/>
+              </a:spcBef>
+              <a:spcAft>
+                <a:spcPts val="0"/>
+              </a:spcAft>
+            </a:pPr>
+            <a:r>
+              <a:rPr sz="800" b="0">
                 <a:solidFill>
                   <a:srgbClr val="F5F1E8"/>
                 </a:solidFill>
@@ -33303,11 +33933,17 @@
           <a:p>
             <a:pPr algn="l">
               <a:lnSpc>
-                <a:spcPct val="135000"/>
-              </a:lnSpc>
-            </a:pPr>
-            <a:r>
-              <a:rPr sz="850" b="0">
+                <a:spcPct val="100000"/>
+              </a:lnSpc>
+              <a:spcBef>
+                <a:spcPts val="0"/>
+              </a:spcBef>
+              <a:spcAft>
+                <a:spcPts val="0"/>
+              </a:spcAft>
+            </a:pPr>
+            <a:r>
+              <a:rPr sz="800" b="0">
                 <a:solidFill>
                   <a:srgbClr val="F5F1E8"/>
                 </a:solidFill>
@@ -33319,11 +33955,17 @@
           <a:p>
             <a:pPr algn="l">
               <a:lnSpc>
-                <a:spcPct val="135000"/>
-              </a:lnSpc>
-            </a:pPr>
-            <a:r>
-              <a:rPr sz="850" b="0">
+                <a:spcPct val="100000"/>
+              </a:lnSpc>
+              <a:spcBef>
+                <a:spcPts val="0"/>
+              </a:spcBef>
+              <a:spcAft>
+                <a:spcPts val="0"/>
+              </a:spcAft>
+            </a:pPr>
+            <a:r>
+              <a:rPr sz="800" b="0">
                 <a:solidFill>
                   <a:srgbClr val="F5F1E8"/>
                 </a:solidFill>
@@ -33455,7 +34097,7 @@
               </a:lnSpc>
             </a:pPr>
             <a:r>
-              <a:rPr sz="850" b="0">
+              <a:rPr sz="800" b="0">
                 <a:solidFill>
                   <a:srgbClr val="B8956A"/>
                 </a:solidFill>
@@ -33525,11 +34167,17 @@
           <a:p>
             <a:pPr algn="l">
               <a:lnSpc>
-                <a:spcPct val="135000"/>
-              </a:lnSpc>
-            </a:pPr>
-            <a:r>
-              <a:rPr sz="850" b="0">
+                <a:spcPct val="100000"/>
+              </a:lnSpc>
+              <a:spcBef>
+                <a:spcPts val="0"/>
+              </a:spcBef>
+              <a:spcAft>
+                <a:spcPts val="0"/>
+              </a:spcAft>
+            </a:pPr>
+            <a:r>
+              <a:rPr sz="800" b="0">
                 <a:solidFill>
                   <a:srgbClr val="F5F1E8"/>
                 </a:solidFill>
@@ -33541,11 +34189,17 @@
           <a:p>
             <a:pPr algn="l">
               <a:lnSpc>
-                <a:spcPct val="135000"/>
-              </a:lnSpc>
-            </a:pPr>
-            <a:r>
-              <a:rPr sz="850" b="0">
+                <a:spcPct val="100000"/>
+              </a:lnSpc>
+              <a:spcBef>
+                <a:spcPts val="0"/>
+              </a:spcBef>
+              <a:spcAft>
+                <a:spcPts val="0"/>
+              </a:spcAft>
+            </a:pPr>
+            <a:r>
+              <a:rPr sz="800" b="0">
                 <a:solidFill>
                   <a:srgbClr val="F5F1E8"/>
                 </a:solidFill>
@@ -33557,11 +34211,17 @@
           <a:p>
             <a:pPr algn="l">
               <a:lnSpc>
-                <a:spcPct val="135000"/>
-              </a:lnSpc>
-            </a:pPr>
-            <a:r>
-              <a:rPr sz="850" b="0">
+                <a:spcPct val="100000"/>
+              </a:lnSpc>
+              <a:spcBef>
+                <a:spcPts val="0"/>
+              </a:spcBef>
+              <a:spcAft>
+                <a:spcPts val="0"/>
+              </a:spcAft>
+            </a:pPr>
+            <a:r>
+              <a:rPr sz="800" b="0">
                 <a:solidFill>
                   <a:srgbClr val="F5F1E8"/>
                 </a:solidFill>
@@ -33573,11 +34233,17 @@
           <a:p>
             <a:pPr algn="l">
               <a:lnSpc>
-                <a:spcPct val="135000"/>
-              </a:lnSpc>
-            </a:pPr>
-            <a:r>
-              <a:rPr sz="850" b="0">
+                <a:spcPct val="100000"/>
+              </a:lnSpc>
+              <a:spcBef>
+                <a:spcPts val="0"/>
+              </a:spcBef>
+              <a:spcAft>
+                <a:spcPts val="0"/>
+              </a:spcAft>
+            </a:pPr>
+            <a:r>
+              <a:rPr sz="800" b="0">
                 <a:solidFill>
                   <a:srgbClr val="F5F1E8"/>
                 </a:solidFill>
@@ -36454,22 +37120,22 @@
         <p:spPr>
           <a:xfrm>
             <a:off x="4453128" y="6263640"/>
-            <a:ext cx="3264408" cy="457200"/>
-          </a:xfrm>
-          <a:prstGeom prst="rect">
-            <a:avLst/>
-          </a:prstGeom>
-          <a:noFill/>
-        </p:spPr>
-        <p:txBody>
-          <a:bodyPr wrap="square" lIns="0" rIns="0" tIns="0" bIns="0" anchor="t">
-            <a:spAutoFit/>
-          </a:bodyPr>
-          <a:lstStyle/>
-          <a:p>
-            <a:pPr algn="l">
-              <a:lnSpc>
-                <a:spcPct val="130000"/>
+            <a:ext cx="3264408" cy="566928"/>
+          </a:xfrm>
+          <a:prstGeom prst="rect">
+            <a:avLst/>
+          </a:prstGeom>
+          <a:noFill/>
+        </p:spPr>
+        <p:txBody>
+          <a:bodyPr wrap="square" lIns="0" rIns="0" tIns="0" bIns="0" anchor="t">
+            <a:spAutoFit/>
+          </a:bodyPr>
+          <a:lstStyle/>
+          <a:p>
+            <a:pPr algn="l">
+              <a:lnSpc>
+                <a:spcPct val="105000"/>
               </a:lnSpc>
             </a:pPr>
             <a:r>
@@ -36580,22 +37246,22 @@
         <p:spPr>
           <a:xfrm>
             <a:off x="8174736" y="6263640"/>
-            <a:ext cx="3264408" cy="457200"/>
-          </a:xfrm>
-          <a:prstGeom prst="rect">
-            <a:avLst/>
-          </a:prstGeom>
-          <a:noFill/>
-        </p:spPr>
-        <p:txBody>
-          <a:bodyPr wrap="square" lIns="0" rIns="0" tIns="0" bIns="0" anchor="t">
-            <a:spAutoFit/>
-          </a:bodyPr>
-          <a:lstStyle/>
-          <a:p>
-            <a:pPr algn="l">
-              <a:lnSpc>
-                <a:spcPct val="130000"/>
+            <a:ext cx="3264408" cy="566928"/>
+          </a:xfrm>
+          <a:prstGeom prst="rect">
+            <a:avLst/>
+          </a:prstGeom>
+          <a:noFill/>
+        </p:spPr>
+        <p:txBody>
+          <a:bodyPr wrap="square" lIns="0" rIns="0" tIns="0" bIns="0" anchor="t">
+            <a:spAutoFit/>
+          </a:bodyPr>
+          <a:lstStyle/>
+          <a:p>
+            <a:pPr algn="l">
+              <a:lnSpc>
+                <a:spcPct val="105000"/>
               </a:lnSpc>
             </a:pPr>
             <a:r>
@@ -37155,26 +37821,32 @@
         <p:spPr>
           <a:xfrm>
             <a:off x="749808" y="2724912"/>
-            <a:ext cx="3264408" cy="228600"/>
-          </a:xfrm>
-          <a:prstGeom prst="rect">
-            <a:avLst/>
-          </a:prstGeom>
-          <a:noFill/>
-        </p:spPr>
-        <p:txBody>
-          <a:bodyPr wrap="square" lIns="0" rIns="0" tIns="0" bIns="0" anchor="t">
-            <a:spAutoFit/>
-          </a:bodyPr>
-          <a:lstStyle/>
-          <a:p>
-            <a:pPr algn="l">
-              <a:lnSpc>
-                <a:spcPct val="120000"/>
-              </a:lnSpc>
-            </a:pPr>
-            <a:r>
-              <a:rPr sz="850" b="0">
+            <a:ext cx="3264408" cy="292608"/>
+          </a:xfrm>
+          <a:prstGeom prst="rect">
+            <a:avLst/>
+          </a:prstGeom>
+          <a:noFill/>
+        </p:spPr>
+        <p:txBody>
+          <a:bodyPr wrap="square" lIns="0" rIns="0" tIns="0" bIns="0" anchor="t">
+            <a:spAutoFit/>
+          </a:bodyPr>
+          <a:lstStyle/>
+          <a:p>
+            <a:pPr algn="l">
+              <a:lnSpc>
+                <a:spcPct val="100000"/>
+              </a:lnSpc>
+              <a:spcBef>
+                <a:spcPts val="0"/>
+              </a:spcBef>
+              <a:spcAft>
+                <a:spcPts val="0"/>
+              </a:spcAft>
+            </a:pPr>
+            <a:r>
+              <a:rPr sz="800" b="0">
                 <a:solidFill>
                   <a:srgbClr val="A8A092"/>
                 </a:solidFill>
@@ -37194,26 +37866,32 @@
         <p:spPr>
           <a:xfrm>
             <a:off x="749808" y="2935224"/>
-            <a:ext cx="3264408" cy="201168"/>
-          </a:xfrm>
-          <a:prstGeom prst="rect">
-            <a:avLst/>
-          </a:prstGeom>
-          <a:noFill/>
-        </p:spPr>
-        <p:txBody>
-          <a:bodyPr wrap="square" lIns="0" rIns="0" tIns="0" bIns="0" anchor="t">
-            <a:spAutoFit/>
-          </a:bodyPr>
-          <a:lstStyle/>
-          <a:p>
-            <a:pPr algn="l">
-              <a:lnSpc>
-                <a:spcPct val="120000"/>
-              </a:lnSpc>
-            </a:pPr>
-            <a:r>
-              <a:rPr sz="900" b="1">
+            <a:ext cx="3264408" cy="256032"/>
+          </a:xfrm>
+          <a:prstGeom prst="rect">
+            <a:avLst/>
+          </a:prstGeom>
+          <a:noFill/>
+        </p:spPr>
+        <p:txBody>
+          <a:bodyPr wrap="square" lIns="0" rIns="0" tIns="0" bIns="0" anchor="t">
+            <a:spAutoFit/>
+          </a:bodyPr>
+          <a:lstStyle/>
+          <a:p>
+            <a:pPr algn="l">
+              <a:lnSpc>
+                <a:spcPct val="100000"/>
+              </a:lnSpc>
+              <a:spcBef>
+                <a:spcPts val="0"/>
+              </a:spcBef>
+              <a:spcAft>
+                <a:spcPts val="0"/>
+              </a:spcAft>
+            </a:pPr>
+            <a:r>
+              <a:rPr sz="850" b="1">
                 <a:solidFill>
                   <a:srgbClr val="B8956A"/>
                 </a:solidFill>
@@ -37400,26 +38078,32 @@
         <p:spPr>
           <a:xfrm>
             <a:off x="4471416" y="2724912"/>
-            <a:ext cx="3264408" cy="228600"/>
-          </a:xfrm>
-          <a:prstGeom prst="rect">
-            <a:avLst/>
-          </a:prstGeom>
-          <a:noFill/>
-        </p:spPr>
-        <p:txBody>
-          <a:bodyPr wrap="square" lIns="0" rIns="0" tIns="0" bIns="0" anchor="t">
-            <a:spAutoFit/>
-          </a:bodyPr>
-          <a:lstStyle/>
-          <a:p>
-            <a:pPr algn="l">
-              <a:lnSpc>
-                <a:spcPct val="120000"/>
-              </a:lnSpc>
-            </a:pPr>
-            <a:r>
-              <a:rPr sz="850" b="0">
+            <a:ext cx="3264408" cy="292608"/>
+          </a:xfrm>
+          <a:prstGeom prst="rect">
+            <a:avLst/>
+          </a:prstGeom>
+          <a:noFill/>
+        </p:spPr>
+        <p:txBody>
+          <a:bodyPr wrap="square" lIns="0" rIns="0" tIns="0" bIns="0" anchor="t">
+            <a:spAutoFit/>
+          </a:bodyPr>
+          <a:lstStyle/>
+          <a:p>
+            <a:pPr algn="l">
+              <a:lnSpc>
+                <a:spcPct val="100000"/>
+              </a:lnSpc>
+              <a:spcBef>
+                <a:spcPts val="0"/>
+              </a:spcBef>
+              <a:spcAft>
+                <a:spcPts val="0"/>
+              </a:spcAft>
+            </a:pPr>
+            <a:r>
+              <a:rPr sz="800" b="0">
                 <a:solidFill>
                   <a:srgbClr val="A8A092"/>
                 </a:solidFill>
@@ -37439,26 +38123,32 @@
         <p:spPr>
           <a:xfrm>
             <a:off x="4471416" y="2935224"/>
-            <a:ext cx="3264408" cy="201168"/>
-          </a:xfrm>
-          <a:prstGeom prst="rect">
-            <a:avLst/>
-          </a:prstGeom>
-          <a:noFill/>
-        </p:spPr>
-        <p:txBody>
-          <a:bodyPr wrap="square" lIns="0" rIns="0" tIns="0" bIns="0" anchor="t">
-            <a:spAutoFit/>
-          </a:bodyPr>
-          <a:lstStyle/>
-          <a:p>
-            <a:pPr algn="l">
-              <a:lnSpc>
-                <a:spcPct val="120000"/>
-              </a:lnSpc>
-            </a:pPr>
-            <a:r>
-              <a:rPr sz="900" b="1">
+            <a:ext cx="3264408" cy="256032"/>
+          </a:xfrm>
+          <a:prstGeom prst="rect">
+            <a:avLst/>
+          </a:prstGeom>
+          <a:noFill/>
+        </p:spPr>
+        <p:txBody>
+          <a:bodyPr wrap="square" lIns="0" rIns="0" tIns="0" bIns="0" anchor="t">
+            <a:spAutoFit/>
+          </a:bodyPr>
+          <a:lstStyle/>
+          <a:p>
+            <a:pPr algn="l">
+              <a:lnSpc>
+                <a:spcPct val="100000"/>
+              </a:lnSpc>
+              <a:spcBef>
+                <a:spcPts val="0"/>
+              </a:spcBef>
+              <a:spcAft>
+                <a:spcPts val="0"/>
+              </a:spcAft>
+            </a:pPr>
+            <a:r>
+              <a:rPr sz="850" b="1">
                 <a:solidFill>
                   <a:srgbClr val="B8956A"/>
                 </a:solidFill>
@@ -37645,26 +38335,32 @@
         <p:spPr>
           <a:xfrm>
             <a:off x="8193024" y="2724912"/>
-            <a:ext cx="3264408" cy="228600"/>
-          </a:xfrm>
-          <a:prstGeom prst="rect">
-            <a:avLst/>
-          </a:prstGeom>
-          <a:noFill/>
-        </p:spPr>
-        <p:txBody>
-          <a:bodyPr wrap="square" lIns="0" rIns="0" tIns="0" bIns="0" anchor="t">
-            <a:spAutoFit/>
-          </a:bodyPr>
-          <a:lstStyle/>
-          <a:p>
-            <a:pPr algn="l">
-              <a:lnSpc>
-                <a:spcPct val="120000"/>
-              </a:lnSpc>
-            </a:pPr>
-            <a:r>
-              <a:rPr sz="850" b="0">
+            <a:ext cx="3264408" cy="292608"/>
+          </a:xfrm>
+          <a:prstGeom prst="rect">
+            <a:avLst/>
+          </a:prstGeom>
+          <a:noFill/>
+        </p:spPr>
+        <p:txBody>
+          <a:bodyPr wrap="square" lIns="0" rIns="0" tIns="0" bIns="0" anchor="t">
+            <a:spAutoFit/>
+          </a:bodyPr>
+          <a:lstStyle/>
+          <a:p>
+            <a:pPr algn="l">
+              <a:lnSpc>
+                <a:spcPct val="100000"/>
+              </a:lnSpc>
+              <a:spcBef>
+                <a:spcPts val="0"/>
+              </a:spcBef>
+              <a:spcAft>
+                <a:spcPts val="0"/>
+              </a:spcAft>
+            </a:pPr>
+            <a:r>
+              <a:rPr sz="800" b="0">
                 <a:solidFill>
                   <a:srgbClr val="A8A092"/>
                 </a:solidFill>
@@ -37684,26 +38380,32 @@
         <p:spPr>
           <a:xfrm>
             <a:off x="8193024" y="2935224"/>
-            <a:ext cx="3264408" cy="201168"/>
-          </a:xfrm>
-          <a:prstGeom prst="rect">
-            <a:avLst/>
-          </a:prstGeom>
-          <a:noFill/>
-        </p:spPr>
-        <p:txBody>
-          <a:bodyPr wrap="square" lIns="0" rIns="0" tIns="0" bIns="0" anchor="t">
-            <a:spAutoFit/>
-          </a:bodyPr>
-          <a:lstStyle/>
-          <a:p>
-            <a:pPr algn="l">
-              <a:lnSpc>
-                <a:spcPct val="120000"/>
-              </a:lnSpc>
-            </a:pPr>
-            <a:r>
-              <a:rPr sz="900" b="1">
+            <a:ext cx="3264408" cy="256032"/>
+          </a:xfrm>
+          <a:prstGeom prst="rect">
+            <a:avLst/>
+          </a:prstGeom>
+          <a:noFill/>
+        </p:spPr>
+        <p:txBody>
+          <a:bodyPr wrap="square" lIns="0" rIns="0" tIns="0" bIns="0" anchor="t">
+            <a:spAutoFit/>
+          </a:bodyPr>
+          <a:lstStyle/>
+          <a:p>
+            <a:pPr algn="l">
+              <a:lnSpc>
+                <a:spcPct val="100000"/>
+              </a:lnSpc>
+              <a:spcBef>
+                <a:spcPts val="0"/>
+              </a:spcBef>
+              <a:spcAft>
+                <a:spcPts val="0"/>
+              </a:spcAft>
+            </a:pPr>
+            <a:r>
+              <a:rPr sz="850" b="1">
                 <a:solidFill>
                   <a:srgbClr val="B8956A"/>
                 </a:solidFill>
@@ -37890,26 +38592,32 @@
         <p:spPr>
           <a:xfrm>
             <a:off x="749808" y="4133087"/>
-            <a:ext cx="3264408" cy="228600"/>
-          </a:xfrm>
-          <a:prstGeom prst="rect">
-            <a:avLst/>
-          </a:prstGeom>
-          <a:noFill/>
-        </p:spPr>
-        <p:txBody>
-          <a:bodyPr wrap="square" lIns="0" rIns="0" tIns="0" bIns="0" anchor="t">
-            <a:spAutoFit/>
-          </a:bodyPr>
-          <a:lstStyle/>
-          <a:p>
-            <a:pPr algn="l">
-              <a:lnSpc>
-                <a:spcPct val="120000"/>
-              </a:lnSpc>
-            </a:pPr>
-            <a:r>
-              <a:rPr sz="850" b="0">
+            <a:ext cx="3264408" cy="292608"/>
+          </a:xfrm>
+          <a:prstGeom prst="rect">
+            <a:avLst/>
+          </a:prstGeom>
+          <a:noFill/>
+        </p:spPr>
+        <p:txBody>
+          <a:bodyPr wrap="square" lIns="0" rIns="0" tIns="0" bIns="0" anchor="t">
+            <a:spAutoFit/>
+          </a:bodyPr>
+          <a:lstStyle/>
+          <a:p>
+            <a:pPr algn="l">
+              <a:lnSpc>
+                <a:spcPct val="100000"/>
+              </a:lnSpc>
+              <a:spcBef>
+                <a:spcPts val="0"/>
+              </a:spcBef>
+              <a:spcAft>
+                <a:spcPts val="0"/>
+              </a:spcAft>
+            </a:pPr>
+            <a:r>
+              <a:rPr sz="800" b="0">
                 <a:solidFill>
                   <a:srgbClr val="A8A092"/>
                 </a:solidFill>
@@ -37929,26 +38637,32 @@
         <p:spPr>
           <a:xfrm>
             <a:off x="749808" y="4343400"/>
-            <a:ext cx="3264408" cy="201168"/>
-          </a:xfrm>
-          <a:prstGeom prst="rect">
-            <a:avLst/>
-          </a:prstGeom>
-          <a:noFill/>
-        </p:spPr>
-        <p:txBody>
-          <a:bodyPr wrap="square" lIns="0" rIns="0" tIns="0" bIns="0" anchor="t">
-            <a:spAutoFit/>
-          </a:bodyPr>
-          <a:lstStyle/>
-          <a:p>
-            <a:pPr algn="l">
-              <a:lnSpc>
-                <a:spcPct val="120000"/>
-              </a:lnSpc>
-            </a:pPr>
-            <a:r>
-              <a:rPr sz="900" b="1">
+            <a:ext cx="3264408" cy="256032"/>
+          </a:xfrm>
+          <a:prstGeom prst="rect">
+            <a:avLst/>
+          </a:prstGeom>
+          <a:noFill/>
+        </p:spPr>
+        <p:txBody>
+          <a:bodyPr wrap="square" lIns="0" rIns="0" tIns="0" bIns="0" anchor="t">
+            <a:spAutoFit/>
+          </a:bodyPr>
+          <a:lstStyle/>
+          <a:p>
+            <a:pPr algn="l">
+              <a:lnSpc>
+                <a:spcPct val="100000"/>
+              </a:lnSpc>
+              <a:spcBef>
+                <a:spcPts val="0"/>
+              </a:spcBef>
+              <a:spcAft>
+                <a:spcPts val="0"/>
+              </a:spcAft>
+            </a:pPr>
+            <a:r>
+              <a:rPr sz="850" b="1">
                 <a:solidFill>
                   <a:srgbClr val="B8956A"/>
                 </a:solidFill>
@@ -38135,26 +38849,32 @@
         <p:spPr>
           <a:xfrm>
             <a:off x="4471416" y="4133087"/>
-            <a:ext cx="3264408" cy="228600"/>
-          </a:xfrm>
-          <a:prstGeom prst="rect">
-            <a:avLst/>
-          </a:prstGeom>
-          <a:noFill/>
-        </p:spPr>
-        <p:txBody>
-          <a:bodyPr wrap="square" lIns="0" rIns="0" tIns="0" bIns="0" anchor="t">
-            <a:spAutoFit/>
-          </a:bodyPr>
-          <a:lstStyle/>
-          <a:p>
-            <a:pPr algn="l">
-              <a:lnSpc>
-                <a:spcPct val="120000"/>
-              </a:lnSpc>
-            </a:pPr>
-            <a:r>
-              <a:rPr sz="850" b="0">
+            <a:ext cx="3264408" cy="292608"/>
+          </a:xfrm>
+          <a:prstGeom prst="rect">
+            <a:avLst/>
+          </a:prstGeom>
+          <a:noFill/>
+        </p:spPr>
+        <p:txBody>
+          <a:bodyPr wrap="square" lIns="0" rIns="0" tIns="0" bIns="0" anchor="t">
+            <a:spAutoFit/>
+          </a:bodyPr>
+          <a:lstStyle/>
+          <a:p>
+            <a:pPr algn="l">
+              <a:lnSpc>
+                <a:spcPct val="100000"/>
+              </a:lnSpc>
+              <a:spcBef>
+                <a:spcPts val="0"/>
+              </a:spcBef>
+              <a:spcAft>
+                <a:spcPts val="0"/>
+              </a:spcAft>
+            </a:pPr>
+            <a:r>
+              <a:rPr sz="800" b="0">
                 <a:solidFill>
                   <a:srgbClr val="A8A092"/>
                 </a:solidFill>
@@ -38174,26 +38894,32 @@
         <p:spPr>
           <a:xfrm>
             <a:off x="4471416" y="4343400"/>
-            <a:ext cx="3264408" cy="201168"/>
-          </a:xfrm>
-          <a:prstGeom prst="rect">
-            <a:avLst/>
-          </a:prstGeom>
-          <a:noFill/>
-        </p:spPr>
-        <p:txBody>
-          <a:bodyPr wrap="square" lIns="0" rIns="0" tIns="0" bIns="0" anchor="t">
-            <a:spAutoFit/>
-          </a:bodyPr>
-          <a:lstStyle/>
-          <a:p>
-            <a:pPr algn="l">
-              <a:lnSpc>
-                <a:spcPct val="120000"/>
-              </a:lnSpc>
-            </a:pPr>
-            <a:r>
-              <a:rPr sz="900" b="1">
+            <a:ext cx="3264408" cy="256032"/>
+          </a:xfrm>
+          <a:prstGeom prst="rect">
+            <a:avLst/>
+          </a:prstGeom>
+          <a:noFill/>
+        </p:spPr>
+        <p:txBody>
+          <a:bodyPr wrap="square" lIns="0" rIns="0" tIns="0" bIns="0" anchor="t">
+            <a:spAutoFit/>
+          </a:bodyPr>
+          <a:lstStyle/>
+          <a:p>
+            <a:pPr algn="l">
+              <a:lnSpc>
+                <a:spcPct val="100000"/>
+              </a:lnSpc>
+              <a:spcBef>
+                <a:spcPts val="0"/>
+              </a:spcBef>
+              <a:spcAft>
+                <a:spcPts val="0"/>
+              </a:spcAft>
+            </a:pPr>
+            <a:r>
+              <a:rPr sz="850" b="1">
                 <a:solidFill>
                   <a:srgbClr val="B8956A"/>
                 </a:solidFill>
@@ -38380,26 +39106,32 @@
         <p:spPr>
           <a:xfrm>
             <a:off x="8193024" y="4133087"/>
-            <a:ext cx="3264408" cy="228600"/>
-          </a:xfrm>
-          <a:prstGeom prst="rect">
-            <a:avLst/>
-          </a:prstGeom>
-          <a:noFill/>
-        </p:spPr>
-        <p:txBody>
-          <a:bodyPr wrap="square" lIns="0" rIns="0" tIns="0" bIns="0" anchor="t">
-            <a:spAutoFit/>
-          </a:bodyPr>
-          <a:lstStyle/>
-          <a:p>
-            <a:pPr algn="l">
-              <a:lnSpc>
-                <a:spcPct val="120000"/>
-              </a:lnSpc>
-            </a:pPr>
-            <a:r>
-              <a:rPr sz="850" b="0">
+            <a:ext cx="3264408" cy="292608"/>
+          </a:xfrm>
+          <a:prstGeom prst="rect">
+            <a:avLst/>
+          </a:prstGeom>
+          <a:noFill/>
+        </p:spPr>
+        <p:txBody>
+          <a:bodyPr wrap="square" lIns="0" rIns="0" tIns="0" bIns="0" anchor="t">
+            <a:spAutoFit/>
+          </a:bodyPr>
+          <a:lstStyle/>
+          <a:p>
+            <a:pPr algn="l">
+              <a:lnSpc>
+                <a:spcPct val="100000"/>
+              </a:lnSpc>
+              <a:spcBef>
+                <a:spcPts val="0"/>
+              </a:spcBef>
+              <a:spcAft>
+                <a:spcPts val="0"/>
+              </a:spcAft>
+            </a:pPr>
+            <a:r>
+              <a:rPr sz="800" b="0">
                 <a:solidFill>
                   <a:srgbClr val="A8A092"/>
                 </a:solidFill>
@@ -38419,26 +39151,32 @@
         <p:spPr>
           <a:xfrm>
             <a:off x="8193024" y="4343400"/>
-            <a:ext cx="3264408" cy="201168"/>
-          </a:xfrm>
-          <a:prstGeom prst="rect">
-            <a:avLst/>
-          </a:prstGeom>
-          <a:noFill/>
-        </p:spPr>
-        <p:txBody>
-          <a:bodyPr wrap="square" lIns="0" rIns="0" tIns="0" bIns="0" anchor="t">
-            <a:spAutoFit/>
-          </a:bodyPr>
-          <a:lstStyle/>
-          <a:p>
-            <a:pPr algn="l">
-              <a:lnSpc>
-                <a:spcPct val="120000"/>
-              </a:lnSpc>
-            </a:pPr>
-            <a:r>
-              <a:rPr sz="900" b="1">
+            <a:ext cx="3264408" cy="256032"/>
+          </a:xfrm>
+          <a:prstGeom prst="rect">
+            <a:avLst/>
+          </a:prstGeom>
+          <a:noFill/>
+        </p:spPr>
+        <p:txBody>
+          <a:bodyPr wrap="square" lIns="0" rIns="0" tIns="0" bIns="0" anchor="t">
+            <a:spAutoFit/>
+          </a:bodyPr>
+          <a:lstStyle/>
+          <a:p>
+            <a:pPr algn="l">
+              <a:lnSpc>
+                <a:spcPct val="100000"/>
+              </a:lnSpc>
+              <a:spcBef>
+                <a:spcPts val="0"/>
+              </a:spcBef>
+              <a:spcAft>
+                <a:spcPts val="0"/>
+              </a:spcAft>
+            </a:pPr>
+            <a:r>
+              <a:rPr sz="850" b="1">
                 <a:solidFill>
                   <a:srgbClr val="B8956A"/>
                 </a:solidFill>
@@ -38625,26 +39363,32 @@
         <p:spPr>
           <a:xfrm>
             <a:off x="749808" y="5541264"/>
-            <a:ext cx="3264408" cy="228600"/>
-          </a:xfrm>
-          <a:prstGeom prst="rect">
-            <a:avLst/>
-          </a:prstGeom>
-          <a:noFill/>
-        </p:spPr>
-        <p:txBody>
-          <a:bodyPr wrap="square" lIns="0" rIns="0" tIns="0" bIns="0" anchor="t">
-            <a:spAutoFit/>
-          </a:bodyPr>
-          <a:lstStyle/>
-          <a:p>
-            <a:pPr algn="l">
-              <a:lnSpc>
-                <a:spcPct val="120000"/>
-              </a:lnSpc>
-            </a:pPr>
-            <a:r>
-              <a:rPr sz="850" b="0">
+            <a:ext cx="3264408" cy="292608"/>
+          </a:xfrm>
+          <a:prstGeom prst="rect">
+            <a:avLst/>
+          </a:prstGeom>
+          <a:noFill/>
+        </p:spPr>
+        <p:txBody>
+          <a:bodyPr wrap="square" lIns="0" rIns="0" tIns="0" bIns="0" anchor="t">
+            <a:spAutoFit/>
+          </a:bodyPr>
+          <a:lstStyle/>
+          <a:p>
+            <a:pPr algn="l">
+              <a:lnSpc>
+                <a:spcPct val="100000"/>
+              </a:lnSpc>
+              <a:spcBef>
+                <a:spcPts val="0"/>
+              </a:spcBef>
+              <a:spcAft>
+                <a:spcPts val="0"/>
+              </a:spcAft>
+            </a:pPr>
+            <a:r>
+              <a:rPr sz="800" b="0">
                 <a:solidFill>
                   <a:srgbClr val="A8A092"/>
                 </a:solidFill>
@@ -38664,26 +39408,32 @@
         <p:spPr>
           <a:xfrm>
             <a:off x="749808" y="5751576"/>
-            <a:ext cx="3264408" cy="201168"/>
-          </a:xfrm>
-          <a:prstGeom prst="rect">
-            <a:avLst/>
-          </a:prstGeom>
-          <a:noFill/>
-        </p:spPr>
-        <p:txBody>
-          <a:bodyPr wrap="square" lIns="0" rIns="0" tIns="0" bIns="0" anchor="t">
-            <a:spAutoFit/>
-          </a:bodyPr>
-          <a:lstStyle/>
-          <a:p>
-            <a:pPr algn="l">
-              <a:lnSpc>
-                <a:spcPct val="120000"/>
-              </a:lnSpc>
-            </a:pPr>
-            <a:r>
-              <a:rPr sz="900" b="1">
+            <a:ext cx="3264408" cy="256032"/>
+          </a:xfrm>
+          <a:prstGeom prst="rect">
+            <a:avLst/>
+          </a:prstGeom>
+          <a:noFill/>
+        </p:spPr>
+        <p:txBody>
+          <a:bodyPr wrap="square" lIns="0" rIns="0" tIns="0" bIns="0" anchor="t">
+            <a:spAutoFit/>
+          </a:bodyPr>
+          <a:lstStyle/>
+          <a:p>
+            <a:pPr algn="l">
+              <a:lnSpc>
+                <a:spcPct val="100000"/>
+              </a:lnSpc>
+              <a:spcBef>
+                <a:spcPts val="0"/>
+              </a:spcBef>
+              <a:spcAft>
+                <a:spcPts val="0"/>
+              </a:spcAft>
+            </a:pPr>
+            <a:r>
+              <a:rPr sz="850" b="1">
                 <a:solidFill>
                   <a:srgbClr val="B8956A"/>
                 </a:solidFill>
@@ -38870,26 +39620,32 @@
         <p:spPr>
           <a:xfrm>
             <a:off x="4471416" y="5541264"/>
-            <a:ext cx="3264408" cy="228600"/>
-          </a:xfrm>
-          <a:prstGeom prst="rect">
-            <a:avLst/>
-          </a:prstGeom>
-          <a:noFill/>
-        </p:spPr>
-        <p:txBody>
-          <a:bodyPr wrap="square" lIns="0" rIns="0" tIns="0" bIns="0" anchor="t">
-            <a:spAutoFit/>
-          </a:bodyPr>
-          <a:lstStyle/>
-          <a:p>
-            <a:pPr algn="l">
-              <a:lnSpc>
-                <a:spcPct val="120000"/>
-              </a:lnSpc>
-            </a:pPr>
-            <a:r>
-              <a:rPr sz="850" b="0">
+            <a:ext cx="3264408" cy="292608"/>
+          </a:xfrm>
+          <a:prstGeom prst="rect">
+            <a:avLst/>
+          </a:prstGeom>
+          <a:noFill/>
+        </p:spPr>
+        <p:txBody>
+          <a:bodyPr wrap="square" lIns="0" rIns="0" tIns="0" bIns="0" anchor="t">
+            <a:spAutoFit/>
+          </a:bodyPr>
+          <a:lstStyle/>
+          <a:p>
+            <a:pPr algn="l">
+              <a:lnSpc>
+                <a:spcPct val="100000"/>
+              </a:lnSpc>
+              <a:spcBef>
+                <a:spcPts val="0"/>
+              </a:spcBef>
+              <a:spcAft>
+                <a:spcPts val="0"/>
+              </a:spcAft>
+            </a:pPr>
+            <a:r>
+              <a:rPr sz="800" b="0">
                 <a:solidFill>
                   <a:srgbClr val="A8A092"/>
                 </a:solidFill>
@@ -38909,26 +39665,32 @@
         <p:spPr>
           <a:xfrm>
             <a:off x="4471416" y="5751576"/>
-            <a:ext cx="3264408" cy="201168"/>
-          </a:xfrm>
-          <a:prstGeom prst="rect">
-            <a:avLst/>
-          </a:prstGeom>
-          <a:noFill/>
-        </p:spPr>
-        <p:txBody>
-          <a:bodyPr wrap="square" lIns="0" rIns="0" tIns="0" bIns="0" anchor="t">
-            <a:spAutoFit/>
-          </a:bodyPr>
-          <a:lstStyle/>
-          <a:p>
-            <a:pPr algn="l">
-              <a:lnSpc>
-                <a:spcPct val="120000"/>
-              </a:lnSpc>
-            </a:pPr>
-            <a:r>
-              <a:rPr sz="900" b="1">
+            <a:ext cx="3264408" cy="256032"/>
+          </a:xfrm>
+          <a:prstGeom prst="rect">
+            <a:avLst/>
+          </a:prstGeom>
+          <a:noFill/>
+        </p:spPr>
+        <p:txBody>
+          <a:bodyPr wrap="square" lIns="0" rIns="0" tIns="0" bIns="0" anchor="t">
+            <a:spAutoFit/>
+          </a:bodyPr>
+          <a:lstStyle/>
+          <a:p>
+            <a:pPr algn="l">
+              <a:lnSpc>
+                <a:spcPct val="100000"/>
+              </a:lnSpc>
+              <a:spcBef>
+                <a:spcPts val="0"/>
+              </a:spcBef>
+              <a:spcAft>
+                <a:spcPts val="0"/>
+              </a:spcAft>
+            </a:pPr>
+            <a:r>
+              <a:rPr sz="850" b="1">
                 <a:solidFill>
                   <a:srgbClr val="B8956A"/>
                 </a:solidFill>
@@ -39115,26 +39877,32 @@
         <p:spPr>
           <a:xfrm>
             <a:off x="8193024" y="5541264"/>
-            <a:ext cx="3264408" cy="228600"/>
-          </a:xfrm>
-          <a:prstGeom prst="rect">
-            <a:avLst/>
-          </a:prstGeom>
-          <a:noFill/>
-        </p:spPr>
-        <p:txBody>
-          <a:bodyPr wrap="square" lIns="0" rIns="0" tIns="0" bIns="0" anchor="t">
-            <a:spAutoFit/>
-          </a:bodyPr>
-          <a:lstStyle/>
-          <a:p>
-            <a:pPr algn="l">
-              <a:lnSpc>
-                <a:spcPct val="120000"/>
-              </a:lnSpc>
-            </a:pPr>
-            <a:r>
-              <a:rPr sz="850" b="0">
+            <a:ext cx="3264408" cy="292608"/>
+          </a:xfrm>
+          <a:prstGeom prst="rect">
+            <a:avLst/>
+          </a:prstGeom>
+          <a:noFill/>
+        </p:spPr>
+        <p:txBody>
+          <a:bodyPr wrap="square" lIns="0" rIns="0" tIns="0" bIns="0" anchor="t">
+            <a:spAutoFit/>
+          </a:bodyPr>
+          <a:lstStyle/>
+          <a:p>
+            <a:pPr algn="l">
+              <a:lnSpc>
+                <a:spcPct val="100000"/>
+              </a:lnSpc>
+              <a:spcBef>
+                <a:spcPts val="0"/>
+              </a:spcBef>
+              <a:spcAft>
+                <a:spcPts val="0"/>
+              </a:spcAft>
+            </a:pPr>
+            <a:r>
+              <a:rPr sz="800" b="0">
                 <a:solidFill>
                   <a:srgbClr val="A8A092"/>
                 </a:solidFill>
@@ -39154,26 +39922,32 @@
         <p:spPr>
           <a:xfrm>
             <a:off x="8193024" y="5751576"/>
-            <a:ext cx="3264408" cy="201168"/>
-          </a:xfrm>
-          <a:prstGeom prst="rect">
-            <a:avLst/>
-          </a:prstGeom>
-          <a:noFill/>
-        </p:spPr>
-        <p:txBody>
-          <a:bodyPr wrap="square" lIns="0" rIns="0" tIns="0" bIns="0" anchor="t">
-            <a:spAutoFit/>
-          </a:bodyPr>
-          <a:lstStyle/>
-          <a:p>
-            <a:pPr algn="l">
-              <a:lnSpc>
-                <a:spcPct val="120000"/>
-              </a:lnSpc>
-            </a:pPr>
-            <a:r>
-              <a:rPr sz="900" b="1">
+            <a:ext cx="3264408" cy="256032"/>
+          </a:xfrm>
+          <a:prstGeom prst="rect">
+            <a:avLst/>
+          </a:prstGeom>
+          <a:noFill/>
+        </p:spPr>
+        <p:txBody>
+          <a:bodyPr wrap="square" lIns="0" rIns="0" tIns="0" bIns="0" anchor="t">
+            <a:spAutoFit/>
+          </a:bodyPr>
+          <a:lstStyle/>
+          <a:p>
+            <a:pPr algn="l">
+              <a:lnSpc>
+                <a:spcPct val="100000"/>
+              </a:lnSpc>
+              <a:spcBef>
+                <a:spcPts val="0"/>
+              </a:spcBef>
+              <a:spcAft>
+                <a:spcPts val="0"/>
+              </a:spcAft>
+            </a:pPr>
+            <a:r>
+              <a:rPr sz="850" b="1">
                 <a:solidFill>
                   <a:srgbClr val="B8956A"/>
                 </a:solidFill>
@@ -39243,11 +40017,17 @@
           <a:p>
             <a:pPr algn="l">
               <a:lnSpc>
-                <a:spcPct val="120000"/>
-              </a:lnSpc>
-            </a:pPr>
-            <a:r>
-              <a:rPr sz="1050" b="1">
+                <a:spcPct val="100000"/>
+              </a:lnSpc>
+              <a:spcBef>
+                <a:spcPts val="0"/>
+              </a:spcBef>
+              <a:spcAft>
+                <a:spcPts val="0"/>
+              </a:spcAft>
+            </a:pPr>
+            <a:r>
+              <a:rPr sz="850" b="1">
                 <a:solidFill>
                   <a:srgbClr val="D4B896"/>
                 </a:solidFill>
@@ -40115,26 +40895,32 @@
         <p:spPr>
           <a:xfrm>
             <a:off x="6583680" y="3611879"/>
-            <a:ext cx="4663440" cy="310896"/>
-          </a:xfrm>
-          <a:prstGeom prst="rect">
-            <a:avLst/>
-          </a:prstGeom>
-          <a:noFill/>
-        </p:spPr>
-        <p:txBody>
-          <a:bodyPr wrap="square" lIns="0" rIns="0" tIns="0" bIns="0" anchor="t">
-            <a:spAutoFit/>
-          </a:bodyPr>
-          <a:lstStyle/>
-          <a:p>
-            <a:pPr algn="l">
-              <a:lnSpc>
-                <a:spcPct val="125000"/>
-              </a:lnSpc>
-            </a:pPr>
-            <a:r>
-              <a:rPr sz="950" b="0">
+            <a:ext cx="4663440" cy="411480"/>
+          </a:xfrm>
+          <a:prstGeom prst="rect">
+            <a:avLst/>
+          </a:prstGeom>
+          <a:noFill/>
+        </p:spPr>
+        <p:txBody>
+          <a:bodyPr wrap="square" lIns="0" rIns="0" tIns="0" bIns="0" anchor="t">
+            <a:spAutoFit/>
+          </a:bodyPr>
+          <a:lstStyle/>
+          <a:p>
+            <a:pPr algn="l">
+              <a:lnSpc>
+                <a:spcPct val="100000"/>
+              </a:lnSpc>
+              <a:spcBef>
+                <a:spcPts val="0"/>
+              </a:spcBef>
+              <a:spcAft>
+                <a:spcPts val="0"/>
+              </a:spcAft>
+            </a:pPr>
+            <a:r>
+              <a:rPr sz="850" b="0">
                 <a:solidFill>
                   <a:srgbClr val="F5F1E8"/>
                 </a:solidFill>
@@ -42027,26 +42813,32 @@
         <p:spPr>
           <a:xfrm>
             <a:off x="6400800" y="2670048"/>
-            <a:ext cx="5029200" cy="329184"/>
-          </a:xfrm>
-          <a:prstGeom prst="rect">
-            <a:avLst/>
-          </a:prstGeom>
-          <a:noFill/>
-        </p:spPr>
-        <p:txBody>
-          <a:bodyPr wrap="square" lIns="0" rIns="0" tIns="0" bIns="0" anchor="t">
-            <a:spAutoFit/>
-          </a:bodyPr>
-          <a:lstStyle/>
-          <a:p>
-            <a:pPr algn="l">
-              <a:lnSpc>
-                <a:spcPct val="130000"/>
-              </a:lnSpc>
-            </a:pPr>
-            <a:r>
-              <a:rPr sz="1000" b="0">
+            <a:ext cx="5029200" cy="384048"/>
+          </a:xfrm>
+          <a:prstGeom prst="rect">
+            <a:avLst/>
+          </a:prstGeom>
+          <a:noFill/>
+        </p:spPr>
+        <p:txBody>
+          <a:bodyPr wrap="square" lIns="0" rIns="0" tIns="0" bIns="0" anchor="t">
+            <a:spAutoFit/>
+          </a:bodyPr>
+          <a:lstStyle/>
+          <a:p>
+            <a:pPr algn="l">
+              <a:lnSpc>
+                <a:spcPct val="100000"/>
+              </a:lnSpc>
+              <a:spcBef>
+                <a:spcPts val="0"/>
+              </a:spcBef>
+              <a:spcAft>
+                <a:spcPts val="0"/>
+              </a:spcAft>
+            </a:pPr>
+            <a:r>
+              <a:rPr sz="900" b="0">
                 <a:solidFill>
                   <a:srgbClr val="F5F1E8"/>
                 </a:solidFill>
@@ -42105,26 +42897,32 @@
         <p:spPr>
           <a:xfrm>
             <a:off x="6400800" y="3328416"/>
-            <a:ext cx="5029200" cy="329184"/>
-          </a:xfrm>
-          <a:prstGeom prst="rect">
-            <a:avLst/>
-          </a:prstGeom>
-          <a:noFill/>
-        </p:spPr>
-        <p:txBody>
-          <a:bodyPr wrap="square" lIns="0" rIns="0" tIns="0" bIns="0" anchor="t">
-            <a:spAutoFit/>
-          </a:bodyPr>
-          <a:lstStyle/>
-          <a:p>
-            <a:pPr algn="l">
-              <a:lnSpc>
-                <a:spcPct val="130000"/>
-              </a:lnSpc>
-            </a:pPr>
-            <a:r>
-              <a:rPr sz="1000" b="0">
+            <a:ext cx="5029200" cy="384048"/>
+          </a:xfrm>
+          <a:prstGeom prst="rect">
+            <a:avLst/>
+          </a:prstGeom>
+          <a:noFill/>
+        </p:spPr>
+        <p:txBody>
+          <a:bodyPr wrap="square" lIns="0" rIns="0" tIns="0" bIns="0" anchor="t">
+            <a:spAutoFit/>
+          </a:bodyPr>
+          <a:lstStyle/>
+          <a:p>
+            <a:pPr algn="l">
+              <a:lnSpc>
+                <a:spcPct val="100000"/>
+              </a:lnSpc>
+              <a:spcBef>
+                <a:spcPts val="0"/>
+              </a:spcBef>
+              <a:spcAft>
+                <a:spcPts val="0"/>
+              </a:spcAft>
+            </a:pPr>
+            <a:r>
+              <a:rPr sz="900" b="0">
                 <a:solidFill>
                   <a:srgbClr val="F5F1E8"/>
                 </a:solidFill>
@@ -42183,26 +42981,32 @@
         <p:spPr>
           <a:xfrm>
             <a:off x="6400800" y="3986784"/>
-            <a:ext cx="5029200" cy="329184"/>
-          </a:xfrm>
-          <a:prstGeom prst="rect">
-            <a:avLst/>
-          </a:prstGeom>
-          <a:noFill/>
-        </p:spPr>
-        <p:txBody>
-          <a:bodyPr wrap="square" lIns="0" rIns="0" tIns="0" bIns="0" anchor="t">
-            <a:spAutoFit/>
-          </a:bodyPr>
-          <a:lstStyle/>
-          <a:p>
-            <a:pPr algn="l">
-              <a:lnSpc>
-                <a:spcPct val="130000"/>
-              </a:lnSpc>
-            </a:pPr>
-            <a:r>
-              <a:rPr sz="1000" b="0">
+            <a:ext cx="5029200" cy="384048"/>
+          </a:xfrm>
+          <a:prstGeom prst="rect">
+            <a:avLst/>
+          </a:prstGeom>
+          <a:noFill/>
+        </p:spPr>
+        <p:txBody>
+          <a:bodyPr wrap="square" lIns="0" rIns="0" tIns="0" bIns="0" anchor="t">
+            <a:spAutoFit/>
+          </a:bodyPr>
+          <a:lstStyle/>
+          <a:p>
+            <a:pPr algn="l">
+              <a:lnSpc>
+                <a:spcPct val="100000"/>
+              </a:lnSpc>
+              <a:spcBef>
+                <a:spcPts val="0"/>
+              </a:spcBef>
+              <a:spcAft>
+                <a:spcPts val="0"/>
+              </a:spcAft>
+            </a:pPr>
+            <a:r>
+              <a:rPr sz="900" b="0">
                 <a:solidFill>
                   <a:srgbClr val="F5F1E8"/>
                 </a:solidFill>
@@ -42339,26 +43143,32 @@
         <p:spPr>
           <a:xfrm>
             <a:off x="6400800" y="5303520"/>
-            <a:ext cx="5029200" cy="329184"/>
-          </a:xfrm>
-          <a:prstGeom prst="rect">
-            <a:avLst/>
-          </a:prstGeom>
-          <a:noFill/>
-        </p:spPr>
-        <p:txBody>
-          <a:bodyPr wrap="square" lIns="0" rIns="0" tIns="0" bIns="0" anchor="t">
-            <a:spAutoFit/>
-          </a:bodyPr>
-          <a:lstStyle/>
-          <a:p>
-            <a:pPr algn="l">
-              <a:lnSpc>
-                <a:spcPct val="130000"/>
-              </a:lnSpc>
-            </a:pPr>
-            <a:r>
-              <a:rPr sz="1000" b="0">
+            <a:ext cx="5029200" cy="384048"/>
+          </a:xfrm>
+          <a:prstGeom prst="rect">
+            <a:avLst/>
+          </a:prstGeom>
+          <a:noFill/>
+        </p:spPr>
+        <p:txBody>
+          <a:bodyPr wrap="square" lIns="0" rIns="0" tIns="0" bIns="0" anchor="t">
+            <a:spAutoFit/>
+          </a:bodyPr>
+          <a:lstStyle/>
+          <a:p>
+            <a:pPr algn="l">
+              <a:lnSpc>
+                <a:spcPct val="100000"/>
+              </a:lnSpc>
+              <a:spcBef>
+                <a:spcPts val="0"/>
+              </a:spcBef>
+              <a:spcAft>
+                <a:spcPts val="0"/>
+              </a:spcAft>
+            </a:pPr>
+            <a:r>
+              <a:rPr sz="900" b="0">
                 <a:solidFill>
                   <a:srgbClr val="F5F1E8"/>
                 </a:solidFill>
@@ -43347,26 +44157,32 @@
         <p:spPr>
           <a:xfrm>
             <a:off x="2057400" y="4663440"/>
-            <a:ext cx="3840480" cy="274320"/>
-          </a:xfrm>
-          <a:prstGeom prst="rect">
-            <a:avLst/>
-          </a:prstGeom>
-          <a:noFill/>
-        </p:spPr>
-        <p:txBody>
-          <a:bodyPr wrap="square" lIns="0" rIns="0" tIns="0" bIns="0" anchor="t">
-            <a:spAutoFit/>
-          </a:bodyPr>
-          <a:lstStyle/>
-          <a:p>
-            <a:pPr algn="l">
-              <a:lnSpc>
-                <a:spcPct val="120000"/>
-              </a:lnSpc>
-            </a:pPr>
-            <a:r>
-              <a:rPr sz="1000" b="0">
+            <a:ext cx="3840480" cy="320040"/>
+          </a:xfrm>
+          <a:prstGeom prst="rect">
+            <a:avLst/>
+          </a:prstGeom>
+          <a:noFill/>
+        </p:spPr>
+        <p:txBody>
+          <a:bodyPr wrap="square" lIns="0" rIns="0" tIns="0" bIns="0" anchor="t">
+            <a:spAutoFit/>
+          </a:bodyPr>
+          <a:lstStyle/>
+          <a:p>
+            <a:pPr algn="l">
+              <a:lnSpc>
+                <a:spcPct val="100000"/>
+              </a:lnSpc>
+              <a:spcBef>
+                <a:spcPts val="0"/>
+              </a:spcBef>
+              <a:spcAft>
+                <a:spcPts val="0"/>
+              </a:spcAft>
+            </a:pPr>
+            <a:r>
+              <a:rPr sz="850" b="0">
                 <a:solidFill>
                   <a:srgbClr val="F5F1E8"/>
                 </a:solidFill>
@@ -43635,26 +44451,32 @@
         <p:spPr>
           <a:xfrm>
             <a:off x="7680960" y="2743200"/>
-            <a:ext cx="3840480" cy="274320"/>
-          </a:xfrm>
-          <a:prstGeom prst="rect">
-            <a:avLst/>
-          </a:prstGeom>
-          <a:noFill/>
-        </p:spPr>
-        <p:txBody>
-          <a:bodyPr wrap="square" lIns="0" rIns="0" tIns="0" bIns="0" anchor="t">
-            <a:spAutoFit/>
-          </a:bodyPr>
-          <a:lstStyle/>
-          <a:p>
-            <a:pPr algn="l">
-              <a:lnSpc>
-                <a:spcPct val="120000"/>
-              </a:lnSpc>
-            </a:pPr>
-            <a:r>
-              <a:rPr sz="1000" b="0">
+            <a:ext cx="3840480" cy="320040"/>
+          </a:xfrm>
+          <a:prstGeom prst="rect">
+            <a:avLst/>
+          </a:prstGeom>
+          <a:noFill/>
+        </p:spPr>
+        <p:txBody>
+          <a:bodyPr wrap="square" lIns="0" rIns="0" tIns="0" bIns="0" anchor="t">
+            <a:spAutoFit/>
+          </a:bodyPr>
+          <a:lstStyle/>
+          <a:p>
+            <a:pPr algn="l">
+              <a:lnSpc>
+                <a:spcPct val="100000"/>
+              </a:lnSpc>
+              <a:spcBef>
+                <a:spcPts val="0"/>
+              </a:spcBef>
+              <a:spcAft>
+                <a:spcPts val="0"/>
+              </a:spcAft>
+            </a:pPr>
+            <a:r>
+              <a:rPr sz="850" b="0">
                 <a:solidFill>
                   <a:srgbClr val="F5F1E8"/>
                 </a:solidFill>
@@ -44025,26 +44847,32 @@
         <p:spPr>
           <a:xfrm>
             <a:off x="7680960" y="4663440"/>
-            <a:ext cx="3840480" cy="274320"/>
-          </a:xfrm>
-          <a:prstGeom prst="rect">
-            <a:avLst/>
-          </a:prstGeom>
-          <a:noFill/>
-        </p:spPr>
-        <p:txBody>
-          <a:bodyPr wrap="square" lIns="0" rIns="0" tIns="0" bIns="0" anchor="t">
-            <a:spAutoFit/>
-          </a:bodyPr>
-          <a:lstStyle/>
-          <a:p>
-            <a:pPr algn="l">
-              <a:lnSpc>
-                <a:spcPct val="120000"/>
-              </a:lnSpc>
-            </a:pPr>
-            <a:r>
-              <a:rPr sz="1000" b="0">
+            <a:ext cx="3840480" cy="320040"/>
+          </a:xfrm>
+          <a:prstGeom prst="rect">
+            <a:avLst/>
+          </a:prstGeom>
+          <a:noFill/>
+        </p:spPr>
+        <p:txBody>
+          <a:bodyPr wrap="square" lIns="0" rIns="0" tIns="0" bIns="0" anchor="t">
+            <a:spAutoFit/>
+          </a:bodyPr>
+          <a:lstStyle/>
+          <a:p>
+            <a:pPr algn="l">
+              <a:lnSpc>
+                <a:spcPct val="100000"/>
+              </a:lnSpc>
+              <a:spcBef>
+                <a:spcPts val="0"/>
+              </a:spcBef>
+              <a:spcAft>
+                <a:spcPts val="0"/>
+              </a:spcAft>
+            </a:pPr>
+            <a:r>
+              <a:rPr sz="850" b="0">
                 <a:solidFill>
                   <a:srgbClr val="F5F1E8"/>
                 </a:solidFill>
